--- a/sjoskolan/vecka-43/aktuell/v43_02_Transformatorer_och_motorer_elev.pptx
+++ b/sjoskolan/vecka-43/aktuell/v43_02_Transformatorer_och_motorer_elev.pptx
@@ -4254,7 +4254,7 @@
         <p:spPr>
           <a:xfrm xmlns:a="http://schemas.openxmlformats.org/drawingml/2006/main">
             <a:off x="762000" y="2533650"/>
-            <a:ext cx="7620000" cy="2286000"/>
+            <a:ext cx="3886200" cy="2606040"/>
           </a:xfrm>
           <a:prstGeom xmlns:a="http://schemas.openxmlformats.org/drawingml/2006/main" prst="rect">
             <a:avLst/>
@@ -4290,7 +4290,7 @@
                 <a:ea typeface="Calibri"/>
                 <a:cs typeface="Calibri"/>
               </a:rPr>
-              <a:t>En ideal enfastransformator har N₁ = 1 000 varv och N₂ = 100 varv. U₁ = 230 V. Bestäm U₂.</a:t>
+              <a:t>En ideal enfastransformator har N₁ = 1 000 varv och N₂ = 100 varv. U₁ = 230 V. Bestäm U₂.</a:t>
             </a:r>
           </a:p>
         </p:txBody>
@@ -4411,6 +4411,30 @@
           </a:p>
         </p:txBody>
       </p:sp>
+      <p:pic xmlns:a="http://schemas.openxmlformats.org/drawingml/2006/main" xmlns:r="http://schemas.openxmlformats.org/officeDocument/2006/relationships">
+        <p:nvPicPr>
+          <p:cNvPr id="9" name="Figur: Ideal transformator med N1 = 1 000 och N" descr="Ideal transformator med N1 = 1 000 och N2 = 100 varv, U1 = 230 V; U2 okänd"/>
+          <p:cNvPicPr>
+            <a:picLocks noChangeAspect="1"/>
+          </p:cNvPicPr>
+          <p:nvPr/>
+        </p:nvPicPr>
+        <p:blipFill>
+          <a:blip r:embed="rId3"/>
+          <a:stretch>
+            <a:fillRect/>
+          </a:stretch>
+        </p:blipFill>
+        <p:spPr>
+          <a:xfrm>
+            <a:off x="4846320" y="2331720"/>
+            <a:ext cx="3931920" cy="2740984"/>
+          </a:xfrm>
+          <a:prstGeom prst="rect">
+            <a:avLst/>
+          </a:prstGeom>
+        </p:spPr>
+      </p:pic>
     </p:spTree>
     <p:extLst>
       <p:ext uri="{BB962C8B-B14F-4D97-AF65-F5344CB8AC3E}">
@@ -4978,7 +5002,7 @@
         <p:spPr>
           <a:xfrm xmlns:a="http://schemas.openxmlformats.org/drawingml/2006/main">
             <a:off x="762000" y="2533650"/>
-            <a:ext cx="7620000" cy="2286000"/>
+            <a:ext cx="3886200" cy="2606040"/>
           </a:xfrm>
           <a:prstGeom xmlns:a="http://schemas.openxmlformats.org/drawingml/2006/main" prst="rect">
             <a:avLst/>
@@ -5014,7 +5038,7 @@
                 <a:ea typeface="Calibri"/>
                 <a:cs typeface="Calibri"/>
               </a:rPr>
-              <a:t>En ideal transformator matar en resistiv last med 24 V och 3 A. Primärspänningen är 240 V. Bestäm primärströmmen.</a:t>
+              <a:t>En ideal transformator matar en resistiv last med 24 V och 3 A. Primärspänningen är 240 V. Bestäm primärströmmen.</a:t>
             </a:r>
           </a:p>
         </p:txBody>
@@ -5135,6 +5159,30 @@
           </a:p>
         </p:txBody>
       </p:sp>
+      <p:pic xmlns:a="http://schemas.openxmlformats.org/drawingml/2006/main" xmlns:r="http://schemas.openxmlformats.org/officeDocument/2006/relationships">
+        <p:nvPicPr>
+          <p:cNvPr id="9" name="Figur: Ideal transformator med last: U1 = 240 V" descr="Ideal transformator med last: U1 = 240 V, U2 = 24 V och I2 = 3 A; I1 okänd"/>
+          <p:cNvPicPr>
+            <a:picLocks noChangeAspect="1"/>
+          </p:cNvPicPr>
+          <p:nvPr/>
+        </p:nvPicPr>
+        <p:blipFill>
+          <a:blip r:embed="rId3"/>
+          <a:stretch>
+            <a:fillRect/>
+          </a:stretch>
+        </p:blipFill>
+        <p:spPr>
+          <a:xfrm>
+            <a:off x="4846320" y="2331720"/>
+            <a:ext cx="3931920" cy="2740984"/>
+          </a:xfrm>
+          <a:prstGeom prst="rect">
+            <a:avLst/>
+          </a:prstGeom>
+        </p:spPr>
+      </p:pic>
     </p:spTree>
     <p:extLst>
       <p:ext uri="{BB962C8B-B14F-4D97-AF65-F5344CB8AC3E}">
@@ -8195,7 +8243,7 @@
         <p:spPr>
           <a:xfrm xmlns:a="http://schemas.openxmlformats.org/drawingml/2006/main">
             <a:off x="762000" y="1619250"/>
-            <a:ext cx="7620000" cy="1466850"/>
+            <a:ext cx="3977639" cy="1466850"/>
           </a:xfrm>
           <a:prstGeom xmlns:a="http://schemas.openxmlformats.org/drawingml/2006/main" prst="rect">
             <a:avLst/>
@@ -8223,7 +8271,7 @@
               </a:defRPr>
             </a:pPr>
             <a:r>
-              <a:rPr sz="2400" b="0">
+              <a:rPr sz="1800" b="0">
                 <a:solidFill>
                   <a:srgbClr val="111111"/>
                 </a:solidFill>
@@ -8247,7 +8295,7 @@
               </a:defRPr>
             </a:pPr>
             <a:r>
-              <a:rPr sz="2400" b="0">
+              <a:rPr sz="1800" b="0">
                 <a:solidFill>
                   <a:srgbClr val="111111"/>
                 </a:solidFill>
@@ -8277,7 +8325,7 @@
         <p:spPr>
           <a:xfrm xmlns:a="http://schemas.openxmlformats.org/drawingml/2006/main">
             <a:off x="762000" y="3200400"/>
-            <a:ext cx="7620000" cy="838200"/>
+            <a:ext cx="3977639" cy="838200"/>
           </a:xfrm>
           <a:prstGeom xmlns:a="http://schemas.openxmlformats.org/drawingml/2006/main" prst="rect">
             <a:avLst/>
@@ -8305,7 +8353,7 @@
               </a:defRPr>
             </a:pPr>
             <a:r>
-              <a:rPr sz="2925" b="1">
+              <a:rPr sz="2650" b="1">
                 <a:solidFill>
                   <a:srgbClr val="064F91"/>
                 </a:solidFill>
@@ -8335,7 +8383,7 @@
         <p:spPr>
           <a:xfrm xmlns:a="http://schemas.openxmlformats.org/drawingml/2006/main">
             <a:off x="762000" y="4429125"/>
-            <a:ext cx="7620000" cy="1352550"/>
+            <a:ext cx="3977639" cy="1352550"/>
           </a:xfrm>
           <a:prstGeom xmlns:a="http://schemas.openxmlformats.org/drawingml/2006/main" prst="rect">
             <a:avLst/>
@@ -8363,15 +8411,15 @@
               </a:defRPr>
             </a:pPr>
             <a:r>
-              <a:rPr sz="2250" b="0">
-                <a:solidFill>
-                  <a:srgbClr val="111111"/>
-                </a:solidFill>
-                <a:latin typeface="Calibri"/>
-                <a:ea typeface="Calibri"/>
-                <a:cs typeface="Calibri"/>
-              </a:rPr>
-              <a:t>En 400/690 V Δ/Y-motor kan vara kandidat vid 400 V.</a:t>
+              <a:rPr sz="1900" b="0">
+                <a:solidFill>
+                  <a:srgbClr val="111111"/>
+                </a:solidFill>
+                <a:latin typeface="Calibri"/>
+                <a:ea typeface="Calibri"/>
+                <a:cs typeface="Calibri"/>
+              </a:rPr>
+              <a:t>Ombord: en 440/760 V Δ/Y-motor kan vara kandidat vid 440 V.</a:t>
             </a:r>
           </a:p>
           <a:p xmlns:a="http://schemas.openxmlformats.org/drawingml/2006/main">
@@ -8387,7 +8435,7 @@
               </a:defRPr>
             </a:pPr>
             <a:r>
-              <a:rPr sz="2250" b="0">
+              <a:rPr sz="1900" b="0">
                 <a:solidFill>
                   <a:srgbClr val="111111"/>
                 </a:solidFill>
@@ -8458,6 +8506,30 @@
           </a:p>
         </p:txBody>
       </p:sp>
+      <p:pic xmlns:a="http://schemas.openxmlformats.org/drawingml/2006/main" xmlns:r="http://schemas.openxmlformats.org/officeDocument/2006/relationships">
+        <p:nvPicPr>
+          <p:cNvPr id="9" name="Figur: Principskiss av startström över tid för " descr="Principskiss av startström över tid för direktstart och Y/Δ-start med omkoppling"/>
+          <p:cNvPicPr>
+            <a:picLocks noChangeAspect="1"/>
+          </p:cNvPicPr>
+          <p:nvPr/>
+        </p:nvPicPr>
+        <p:blipFill>
+          <a:blip r:embed="rId3"/>
+          <a:stretch>
+            <a:fillRect/>
+          </a:stretch>
+        </p:blipFill>
+        <p:spPr>
+          <a:xfrm>
+            <a:off x="4892040" y="1645920"/>
+            <a:ext cx="3886200" cy="2890202"/>
+          </a:xfrm>
+          <a:prstGeom prst="rect">
+            <a:avLst/>
+          </a:prstGeom>
+        </p:spPr>
+      </p:pic>
     </p:spTree>
     <p:extLst>
       <p:ext uri="{BB962C8B-B14F-4D97-AF65-F5344CB8AC3E}">
@@ -8579,7 +8651,7 @@
         <p:spPr>
           <a:xfrm xmlns:a="http://schemas.openxmlformats.org/drawingml/2006/main">
             <a:off x="762000" y="1619250"/>
-            <a:ext cx="7620000" cy="1466850"/>
+            <a:ext cx="3977639" cy="1466850"/>
           </a:xfrm>
           <a:prstGeom xmlns:a="http://schemas.openxmlformats.org/drawingml/2006/main" prst="rect">
             <a:avLst/>
@@ -8607,7 +8679,7 @@
               </a:defRPr>
             </a:pPr>
             <a:r>
-              <a:rPr sz="2400" b="0">
+              <a:rPr sz="1800" b="0">
                 <a:solidFill>
                   <a:srgbClr val="111111"/>
                 </a:solidFill>
@@ -8631,7 +8703,7 @@
               </a:defRPr>
             </a:pPr>
             <a:r>
-              <a:rPr sz="2400" b="0">
+              <a:rPr sz="1800" b="0">
                 <a:solidFill>
                   <a:srgbClr val="111111"/>
                 </a:solidFill>
@@ -8661,7 +8733,7 @@
         <p:spPr>
           <a:xfrm xmlns:a="http://schemas.openxmlformats.org/drawingml/2006/main">
             <a:off x="762000" y="3200400"/>
-            <a:ext cx="7620000" cy="838200"/>
+            <a:ext cx="3977639" cy="838200"/>
           </a:xfrm>
           <a:prstGeom xmlns:a="http://schemas.openxmlformats.org/drawingml/2006/main" prst="rect">
             <a:avLst/>
@@ -8689,7 +8761,7 @@
               </a:defRPr>
             </a:pPr>
             <a:r>
-              <a:rPr sz="2925" b="1">
+              <a:rPr sz="2550" b="1">
                 <a:solidFill>
                   <a:srgbClr val="064F91"/>
                 </a:solidFill>
@@ -8719,7 +8791,7 @@
         <p:spPr>
           <a:xfrm xmlns:a="http://schemas.openxmlformats.org/drawingml/2006/main">
             <a:off x="762000" y="4429125"/>
-            <a:ext cx="7620000" cy="1352550"/>
+            <a:ext cx="3977639" cy="1352550"/>
           </a:xfrm>
           <a:prstGeom xmlns:a="http://schemas.openxmlformats.org/drawingml/2006/main" prst="rect">
             <a:avLst/>
@@ -8747,7 +8819,7 @@
               </a:defRPr>
             </a:pPr>
             <a:r>
-              <a:rPr sz="2250" b="0">
+              <a:rPr sz="2000" b="0">
                 <a:solidFill>
                   <a:srgbClr val="111111"/>
                 </a:solidFill>
@@ -8771,7 +8843,7 @@
               </a:defRPr>
             </a:pPr>
             <a:r>
-              <a:rPr sz="2250" b="0">
+              <a:rPr sz="2000" b="0">
                 <a:solidFill>
                   <a:srgbClr val="111111"/>
                 </a:solidFill>
@@ -8842,6 +8914,30 @@
           </a:p>
         </p:txBody>
       </p:sp>
+      <p:pic xmlns:a="http://schemas.openxmlformats.org/drawingml/2006/main" xmlns:r="http://schemas.openxmlformats.org/officeDocument/2006/relationships">
+        <p:nvPicPr>
+          <p:cNvPr id="9" name="Figur: Frekvensomriktare: likriktare, DC-mellan" descr="Frekvensomriktare: likriktare, DC-mellanled med lagrad energi och växelriktare med pulsad utgång"/>
+          <p:cNvPicPr>
+            <a:picLocks noChangeAspect="1"/>
+          </p:cNvPicPr>
+          <p:nvPr/>
+        </p:nvPicPr>
+        <p:blipFill>
+          <a:blip r:embed="rId3"/>
+          <a:stretch>
+            <a:fillRect/>
+          </a:stretch>
+        </p:blipFill>
+        <p:spPr>
+          <a:xfrm>
+            <a:off x="4892040" y="1645920"/>
+            <a:ext cx="3886200" cy="2890202"/>
+          </a:xfrm>
+          <a:prstGeom prst="rect">
+            <a:avLst/>
+          </a:prstGeom>
+        </p:spPr>
+      </p:pic>
     </p:spTree>
     <p:extLst>
       <p:ext uri="{BB962C8B-B14F-4D97-AF65-F5344CB8AC3E}">
@@ -9381,7 +9477,7 @@
                 <a:ea typeface="Calibri"/>
                 <a:cs typeface="Calibri"/>
               </a:rPr>
-              <a:t>En sexpolig motor matas med 60 Hz. Rotorn går med 1 140 r/min.</a:t>
+              <a:t>En åttapolig motor matas med 60 Hz. Rotorn går med 873 r/min.</a:t>
             </a:r>
           </a:p>
         </p:txBody>
@@ -9495,7 +9591,7 @@
                 <a:ea typeface="Calibri"/>
                 <a:cs typeface="Calibri"/>
               </a:rPr>
-              <a:t>1. nₛ = 120 · 60/6 = 1 200 r/min.</a:t>
+              <a:t>1. nₛ = 120 · 60/8 = 900 r/min.</a:t>
             </a:r>
           </a:p>
           <a:p xmlns:a="http://schemas.openxmlformats.org/drawingml/2006/main">
@@ -9518,7 +9614,7 @@
                 <a:ea typeface="Calibri"/>
                 <a:cs typeface="Calibri"/>
               </a:rPr>
-              <a:t>2. Skillnad = 1 200 − 1 140 = 60 r/min.</a:t>
+              <a:t>2. Skillnad = 900 − 873 = 27 r/min.</a:t>
             </a:r>
           </a:p>
           <a:p xmlns:a="http://schemas.openxmlformats.org/drawingml/2006/main">
@@ -9541,7 +9637,7 @@
                 <a:ea typeface="Calibri"/>
                 <a:cs typeface="Calibri"/>
               </a:rPr>
-              <a:t>3. s% = 100 · 60/1 200 = 5 %.</a:t>
+              <a:t>3. s% = 100 · 27/900 = 3 %.</a:t>
             </a:r>
           </a:p>
         </p:txBody>
@@ -9598,7 +9694,7 @@
                 <a:ea typeface="Calibri"/>
                 <a:cs typeface="Calibri"/>
               </a:rPr>
-              <a:t>Rotorn går långsammare än fältet vid den angivna motordriften. p är sex poler, inte tre polpar.</a:t>
+              <a:t>Rotorn går långsammare än fältet vid den angivna motordriften. p är åtta poler, inte fyra polpar.</a:t>
             </a:r>
           </a:p>
         </p:txBody>
@@ -10489,7 +10585,7 @@
       </p:sp>
       <p:sp>
         <p:nvSpPr>
-          <p:cNvPr id="10" name="Δ-koppling ger Ugren = Uᴸ">
+          <p:cNvPr id="10" name="Δ-koppling ger Ugren = UL">
             <a:extLst xmlns:a="http://schemas.openxmlformats.org/drawingml/2006/main">
               <a:ext uri="{FF2B5EF4-FFF2-40B4-BE49-F238E27FC236}">
                 <a16:creationId xmlns:a16="http://schemas.microsoft.com/office/drawing/2014/main" id="{BCBD5307-BFF3-450A-BFD6-BF25F5DFCCB7}"/>
@@ -10539,7 +10635,51 @@
                 <a:ea typeface="Calibri"/>
                 <a:cs typeface="Calibri"/>
               </a:rPr>
-              <a:t>Δ-koppling ger Ugren = Uᴸ</a:t>
+              <a:t>Δ-koppling ger </a:t>
+            </a:r>
+            <a:r>
+              <a:rPr sz="2400" b="1">
+                <a:solidFill>
+                  <a:srgbClr val="064F91"/>
+                </a:solidFill>
+                <a:latin typeface="Calibri"/>
+                <a:ea typeface="Calibri"/>
+                <a:cs typeface="Calibri"/>
+              </a:rPr>
+              <a:t>U</a:t>
+            </a:r>
+            <a:r>
+              <a:rPr sz="2400" b="1" baseline="-25000">
+                <a:solidFill>
+                  <a:srgbClr val="064F91"/>
+                </a:solidFill>
+                <a:latin typeface="Calibri"/>
+                <a:ea typeface="Calibri"/>
+                <a:cs typeface="Calibri"/>
+              </a:rPr>
+              <a:t>gren</a:t>
+            </a:r>
+            <a:r>
+              <a:rPr sz="2400" b="1">
+                <a:solidFill>
+                  <a:srgbClr val="064F91"/>
+                </a:solidFill>
+                <a:latin typeface="Calibri"/>
+                <a:ea typeface="Calibri"/>
+                <a:cs typeface="Calibri"/>
+              </a:rPr>
+              <a:t> = U</a:t>
+            </a:r>
+            <a:r>
+              <a:rPr sz="2400" b="1" baseline="-25000">
+                <a:solidFill>
+                  <a:srgbClr val="064F91"/>
+                </a:solidFill>
+                <a:latin typeface="Calibri"/>
+                <a:ea typeface="Calibri"/>
+                <a:cs typeface="Calibri"/>
+              </a:rPr>
+              <a:t>L</a:t>
             </a:r>
           </a:p>
         </p:txBody>
@@ -12501,7 +12641,95 @@
                 <a:ea typeface="Calibri"/>
                 <a:cs typeface="Calibri"/>
               </a:rPr>
-              <a:t>η = Paxel/Pᵢₙ     Pförlust = Pᵢₙ − Paxel</a:t>
+              <a:t>η = </a:t>
+            </a:r>
+            <a:r>
+              <a:rPr sz="2400" b="1">
+                <a:solidFill>
+                  <a:srgbClr val="064F91"/>
+                </a:solidFill>
+                <a:latin typeface="Calibri"/>
+                <a:ea typeface="Calibri"/>
+                <a:cs typeface="Calibri"/>
+              </a:rPr>
+              <a:t>P</a:t>
+            </a:r>
+            <a:r>
+              <a:rPr sz="2400" b="1" baseline="-25000">
+                <a:solidFill>
+                  <a:srgbClr val="064F91"/>
+                </a:solidFill>
+                <a:latin typeface="Calibri"/>
+                <a:ea typeface="Calibri"/>
+                <a:cs typeface="Calibri"/>
+              </a:rPr>
+              <a:t>axel</a:t>
+            </a:r>
+            <a:r>
+              <a:rPr sz="2400" b="1">
+                <a:solidFill>
+                  <a:srgbClr val="064F91"/>
+                </a:solidFill>
+                <a:latin typeface="Calibri"/>
+                <a:ea typeface="Calibri"/>
+                <a:cs typeface="Calibri"/>
+              </a:rPr>
+              <a:t>/Pᵢₙ     </a:t>
+            </a:r>
+            <a:r>
+              <a:rPr sz="2400" b="1">
+                <a:solidFill>
+                  <a:srgbClr val="064F91"/>
+                </a:solidFill>
+                <a:latin typeface="Calibri"/>
+                <a:ea typeface="Calibri"/>
+                <a:cs typeface="Calibri"/>
+              </a:rPr>
+              <a:t>P</a:t>
+            </a:r>
+            <a:r>
+              <a:rPr sz="2400" b="1" baseline="-25000">
+                <a:solidFill>
+                  <a:srgbClr val="064F91"/>
+                </a:solidFill>
+                <a:latin typeface="Calibri"/>
+                <a:ea typeface="Calibri"/>
+                <a:cs typeface="Calibri"/>
+              </a:rPr>
+              <a:t>förlust</a:t>
+            </a:r>
+            <a:r>
+              <a:rPr sz="2400" b="1">
+                <a:solidFill>
+                  <a:srgbClr val="064F91"/>
+                </a:solidFill>
+                <a:latin typeface="Calibri"/>
+                <a:ea typeface="Calibri"/>
+                <a:cs typeface="Calibri"/>
+              </a:rPr>
+              <a:t> = Pᵢₙ − </a:t>
+            </a:r>
+            <a:r>
+              <a:rPr sz="2400" b="1">
+                <a:solidFill>
+                  <a:srgbClr val="064F91"/>
+                </a:solidFill>
+                <a:latin typeface="Calibri"/>
+                <a:ea typeface="Calibri"/>
+                <a:cs typeface="Calibri"/>
+              </a:rPr>
+              <a:t>P</a:t>
+            </a:r>
+            <a:r>
+              <a:rPr sz="2400" b="1" baseline="-25000">
+                <a:solidFill>
+                  <a:srgbClr val="064F91"/>
+                </a:solidFill>
+                <a:latin typeface="Calibri"/>
+                <a:ea typeface="Calibri"/>
+                <a:cs typeface="Calibri"/>
+              </a:rPr>
+              <a:t>axel</a:t>
             </a:r>
           </a:p>
         </p:txBody>
@@ -12615,7 +12843,40 @@
                 <a:ea typeface="Calibri"/>
                 <a:cs typeface="Calibri"/>
               </a:rPr>
-              <a:t>Förutsättningar: Pᵢₙ = 4,0 kW och Paxel = 3,4 kW gäller samma driftfall.</a:t>
+              <a:t>Förutsättningar: Pᵢₙ = 4,0 kW och </a:t>
+            </a:r>
+            <a:r>
+              <a:rPr sz="2025" b="0">
+                <a:solidFill>
+                  <a:srgbClr val="111111"/>
+                </a:solidFill>
+                <a:latin typeface="Calibri"/>
+                <a:ea typeface="Calibri"/>
+                <a:cs typeface="Calibri"/>
+              </a:rPr>
+              <a:t>P</a:t>
+            </a:r>
+            <a:r>
+              <a:rPr sz="2025" b="0" baseline="-25000">
+                <a:solidFill>
+                  <a:srgbClr val="111111"/>
+                </a:solidFill>
+                <a:latin typeface="Calibri"/>
+                <a:ea typeface="Calibri"/>
+                <a:cs typeface="Calibri"/>
+              </a:rPr>
+              <a:t>axel</a:t>
+            </a:r>
+            <a:r>
+              <a:rPr sz="2025" b="0">
+                <a:solidFill>
+                  <a:srgbClr val="111111"/>
+                </a:solidFill>
+                <a:latin typeface="Calibri"/>
+                <a:ea typeface="Calibri"/>
+                <a:cs typeface="Calibri"/>
+              </a:rPr>
+              <a:t> = 3,4 kW gäller samma driftfall.</a:t>
             </a:r>
           </a:p>
         </p:txBody>
@@ -14437,64 +14698,6 @@
       </p:sp>
       <p:sp>
         <p:nvSpPr>
-          <p:cNvPr id="7" name="Källor och lärarstöd finns även i bildanteckningarna.">
-            <a:extLst xmlns:a="http://schemas.openxmlformats.org/drawingml/2006/main">
-              <a:ext uri="{FF2B5EF4-FFF2-40B4-BE49-F238E27FC236}">
-                <a16:creationId xmlns:a16="http://schemas.microsoft.com/office/drawing/2014/main" id="{F82C6B1B-7011-4A56-AFF2-29297EEB6DC1}"/>
-              </a:ext>
-            </a:extLst>
-          </p:cNvPr>
-          <p:cNvSpPr>
-            <a:spLocks xmlns:a="http://schemas.openxmlformats.org/drawingml/2006/main" noGrp="1"/>
-          </p:cNvSpPr>
-          <p:nvPr/>
-        </p:nvSpPr>
-        <p:spPr>
-          <a:xfrm xmlns:a="http://schemas.openxmlformats.org/drawingml/2006/main">
-            <a:off x="762000" y="5676900"/>
-            <a:ext cx="7620000" cy="352425"/>
-          </a:xfrm>
-          <a:prstGeom xmlns:a="http://schemas.openxmlformats.org/drawingml/2006/main" prst="rect">
-            <a:avLst/>
-          </a:prstGeom>
-          <a:noFill xmlns:a="http://schemas.openxmlformats.org/drawingml/2006/main"/>
-          <a:ln xmlns:a="http://schemas.openxmlformats.org/drawingml/2006/main" w="0">
-            <a:noFill/>
-          </a:ln>
-        </p:spPr>
-        <p:txBody>
-          <a:bodyPr xmlns:a="http://schemas.openxmlformats.org/drawingml/2006/main" wrap="square" lIns="0" tIns="0" rIns="0" bIns="0" anchor="t">
-            <a:noAutofit/>
-          </a:bodyPr>
-          <a:lstStyle xmlns:a="http://schemas.openxmlformats.org/drawingml/2006/main"/>
-          <a:p xmlns:a="http://schemas.openxmlformats.org/drawingml/2006/main">
-            <a:pPr algn="l">
-              <a:buNone/>
-              <a:defRPr sz="1800" b="0">
-                <a:solidFill>
-                  <a:srgbClr val="111111"/>
-                </a:solidFill>
-                <a:latin typeface="Calibri"/>
-                <a:ea typeface="Calibri"/>
-                <a:cs typeface="Calibri"/>
-              </a:defRPr>
-            </a:pPr>
-            <a:r>
-              <a:rPr sz="1800" b="0">
-                <a:solidFill>
-                  <a:srgbClr val="111111"/>
-                </a:solidFill>
-                <a:latin typeface="Calibri"/>
-                <a:ea typeface="Calibri"/>
-                <a:cs typeface="Calibri"/>
-              </a:rPr>
-              <a:t>Källor och lärarstöd finns även i bildanteckningarna.</a:t>
-            </a:r>
-          </a:p>
-        </p:txBody>
-      </p:sp>
-      <p:sp>
-        <p:nvSpPr>
           <p:cNvPr id="8" name="22">
             <a:extLst xmlns:a="http://schemas.openxmlformats.org/drawingml/2006/main">
               <a:ext uri="{FF2B5EF4-FFF2-40B4-BE49-F238E27FC236}">
@@ -15585,7 +15788,7 @@
         <p:spPr>
           <a:xfrm xmlns:a="http://schemas.openxmlformats.org/drawingml/2006/main">
             <a:off x="762000" y="1619250"/>
-            <a:ext cx="7620000" cy="1466850"/>
+            <a:ext cx="3977639" cy="1466850"/>
           </a:xfrm>
           <a:prstGeom xmlns:a="http://schemas.openxmlformats.org/drawingml/2006/main" prst="rect">
             <a:avLst/>
@@ -15613,7 +15816,7 @@
               </a:defRPr>
             </a:pPr>
             <a:r>
-              <a:rPr sz="2400" b="0">
+              <a:rPr sz="1800" b="0">
                 <a:solidFill>
                   <a:srgbClr val="111111"/>
                 </a:solidFill>
@@ -15637,7 +15840,7 @@
               </a:defRPr>
             </a:pPr>
             <a:r>
-              <a:rPr sz="2400" b="0">
+              <a:rPr sz="1800" b="0">
                 <a:solidFill>
                   <a:srgbClr val="111111"/>
                 </a:solidFill>
@@ -15667,7 +15870,7 @@
         <p:spPr>
           <a:xfrm xmlns:a="http://schemas.openxmlformats.org/drawingml/2006/main">
             <a:off x="762000" y="3200400"/>
-            <a:ext cx="7620000" cy="838200"/>
+            <a:ext cx="3977639" cy="838200"/>
           </a:xfrm>
           <a:prstGeom xmlns:a="http://schemas.openxmlformats.org/drawingml/2006/main" prst="rect">
             <a:avLst/>
@@ -15695,7 +15898,7 @@
               </a:defRPr>
             </a:pPr>
             <a:r>
-              <a:rPr sz="2925" b="1">
+              <a:rPr sz="2650" b="1">
                 <a:solidFill>
                   <a:srgbClr val="064F91"/>
                 </a:solidFill>
@@ -15703,7 +15906,7 @@
                 <a:ea typeface="Calibri"/>
                 <a:cs typeface="Calibri"/>
               </a:rPr>
-              <a:t>U₁/U₂ = N₁/N₂     U₁I₁ = U₂I₂</a:t>
+              <a:t>U₁/U₂ = N₁/N₂     U₁I₁ = U₂I₂</a:t>
             </a:r>
           </a:p>
         </p:txBody>
@@ -15725,7 +15928,7 @@
         <p:spPr>
           <a:xfrm xmlns:a="http://schemas.openxmlformats.org/drawingml/2006/main">
             <a:off x="762000" y="4429125"/>
-            <a:ext cx="7620000" cy="1352550"/>
+            <a:ext cx="3977639" cy="1352550"/>
           </a:xfrm>
           <a:prstGeom xmlns:a="http://schemas.openxmlformats.org/drawingml/2006/main" prst="rect">
             <a:avLst/>
@@ -15753,15 +15956,15 @@
               </a:defRPr>
             </a:pPr>
             <a:r>
-              <a:rPr sz="2250" b="0">
-                <a:solidFill>
-                  <a:srgbClr val="111111"/>
-                </a:solidFill>
-                <a:latin typeface="Calibri"/>
-                <a:ea typeface="Calibri"/>
-                <a:cs typeface="Calibri"/>
-              </a:rPr>
-              <a:t>230 V till 23 V ger omsättningen 10:1.</a:t>
+              <a:rPr sz="2050" b="0">
+                <a:solidFill>
+                  <a:srgbClr val="111111"/>
+                </a:solidFill>
+                <a:latin typeface="Calibri"/>
+                <a:ea typeface="Calibri"/>
+                <a:cs typeface="Calibri"/>
+              </a:rPr>
+              <a:t>440 V till 110 V ger omsättningen 4:1.</a:t>
             </a:r>
           </a:p>
           <a:p xmlns:a="http://schemas.openxmlformats.org/drawingml/2006/main">
@@ -15777,15 +15980,15 @@
               </a:defRPr>
             </a:pPr>
             <a:r>
-              <a:rPr sz="2250" b="0">
-                <a:solidFill>
-                  <a:srgbClr val="111111"/>
-                </a:solidFill>
-                <a:latin typeface="Calibri"/>
-                <a:ea typeface="Calibri"/>
-                <a:cs typeface="Calibri"/>
-              </a:rPr>
-              <a:t>2 A på sekundären motsvarar idealt 0,20 A på primären.</a:t>
+              <a:rPr sz="2050" b="0">
+                <a:solidFill>
+                  <a:srgbClr val="111111"/>
+                </a:solidFill>
+                <a:latin typeface="Calibri"/>
+                <a:ea typeface="Calibri"/>
+                <a:cs typeface="Calibri"/>
+              </a:rPr>
+              <a:t>2 A på sekundären motsvarar idealt 0,50 A på primären.</a:t>
             </a:r>
           </a:p>
         </p:txBody>
@@ -15848,6 +16051,30 @@
           </a:p>
         </p:txBody>
       </p:sp>
+      <p:pic xmlns:a="http://schemas.openxmlformats.org/drawingml/2006/main" xmlns:r="http://schemas.openxmlformats.org/officeDocument/2006/relationships">
+        <p:nvPicPr>
+          <p:cNvPr id="9" name="Figur: Ideal transformator med lindningarna N1 " descr="Ideal transformator med lindningarna N1 och N2; 440 V på primärsidan och 110 V på sekundärsidan"/>
+          <p:cNvPicPr>
+            <a:picLocks noChangeAspect="1"/>
+          </p:cNvPicPr>
+          <p:nvPr/>
+        </p:nvPicPr>
+        <p:blipFill>
+          <a:blip r:embed="rId3"/>
+          <a:stretch>
+            <a:fillRect/>
+          </a:stretch>
+        </p:blipFill>
+        <p:spPr>
+          <a:xfrm>
+            <a:off x="4892040" y="1645920"/>
+            <a:ext cx="3886200" cy="2709112"/>
+          </a:xfrm>
+          <a:prstGeom prst="rect">
+            <a:avLst/>
+          </a:prstGeom>
+        </p:spPr>
+      </p:pic>
     </p:spTree>
     <p:extLst>
       <p:ext uri="{BB962C8B-B14F-4D97-AF65-F5344CB8AC3E}">
@@ -16145,7 +16372,7 @@
                 <a:ea typeface="Calibri"/>
                 <a:cs typeface="Calibri"/>
               </a:rPr>
-              <a:t>50 Hz och fyra poler ger nₛ = 1 500 r/min.</a:t>
+              <a:t>Ombord: 60 Hz och fyra poler ger nₛ = 1 800 r/min.</a:t>
             </a:r>
           </a:p>
           <a:p xmlns:a="http://schemas.openxmlformats.org/drawingml/2006/main">
@@ -16353,7 +16580,7 @@
         <p:spPr>
           <a:xfrm xmlns:a="http://schemas.openxmlformats.org/drawingml/2006/main">
             <a:off x="762000" y="1619250"/>
-            <a:ext cx="7620000" cy="1466850"/>
+            <a:ext cx="3977639" cy="1466850"/>
           </a:xfrm>
           <a:prstGeom xmlns:a="http://schemas.openxmlformats.org/drawingml/2006/main" prst="rect">
             <a:avLst/>
@@ -16381,7 +16608,7 @@
               </a:defRPr>
             </a:pPr>
             <a:r>
-              <a:rPr sz="2400" b="0">
+              <a:rPr sz="1750" b="0">
                 <a:solidFill>
                   <a:srgbClr val="111111"/>
                 </a:solidFill>
@@ -16405,7 +16632,7 @@
               </a:defRPr>
             </a:pPr>
             <a:r>
-              <a:rPr sz="2400" b="0">
+              <a:rPr sz="1750" b="0">
                 <a:solidFill>
                   <a:srgbClr val="111111"/>
                 </a:solidFill>
@@ -16435,7 +16662,7 @@
         <p:spPr>
           <a:xfrm xmlns:a="http://schemas.openxmlformats.org/drawingml/2006/main">
             <a:off x="762000" y="3200400"/>
-            <a:ext cx="7620000" cy="838200"/>
+            <a:ext cx="3977639" cy="838200"/>
           </a:xfrm>
           <a:prstGeom xmlns:a="http://schemas.openxmlformats.org/drawingml/2006/main" prst="rect">
             <a:avLst/>
@@ -16471,7 +16698,7 @@
                 <a:ea typeface="Calibri"/>
                 <a:cs typeface="Calibri"/>
               </a:rPr>
-              <a:t>s = (nₛ − n)/nₛ</a:t>
+              <a:t>s = (nₛ − n)/nₛ</a:t>
             </a:r>
           </a:p>
         </p:txBody>
@@ -16493,7 +16720,7 @@
         <p:spPr>
           <a:xfrm xmlns:a="http://schemas.openxmlformats.org/drawingml/2006/main">
             <a:off x="762000" y="4429125"/>
-            <a:ext cx="7620000" cy="1352550"/>
+            <a:ext cx="3977639" cy="1352550"/>
           </a:xfrm>
           <a:prstGeom xmlns:a="http://schemas.openxmlformats.org/drawingml/2006/main" prst="rect">
             <a:avLst/>
@@ -16521,15 +16748,15 @@
               </a:defRPr>
             </a:pPr>
             <a:r>
-              <a:rPr sz="2250" b="0">
-                <a:solidFill>
-                  <a:srgbClr val="111111"/>
-                </a:solidFill>
-                <a:latin typeface="Calibri"/>
-                <a:ea typeface="Calibri"/>
-                <a:cs typeface="Calibri"/>
-              </a:rPr>
-              <a:t>nₛ = 1 500 och n = 1 440 r/min ger s = 0,04 = 4 %.</a:t>
+              <a:rPr sz="2100" b="0">
+                <a:solidFill>
+                  <a:srgbClr val="111111"/>
+                </a:solidFill>
+                <a:latin typeface="Calibri"/>
+                <a:ea typeface="Calibri"/>
+                <a:cs typeface="Calibri"/>
+              </a:rPr>
+              <a:t>nₛ = 1 800 och n = 1 746 r/min ger s = 0,03 = 3 %.</a:t>
             </a:r>
           </a:p>
           <a:p xmlns:a="http://schemas.openxmlformats.org/drawingml/2006/main">
@@ -16545,7 +16772,7 @@
               </a:defRPr>
             </a:pPr>
             <a:r>
-              <a:rPr sz="2250" b="0">
+              <a:rPr sz="2100" b="0">
                 <a:solidFill>
                   <a:srgbClr val="111111"/>
                 </a:solidFill>
@@ -16616,6 +16843,30 @@
           </a:p>
         </p:txBody>
       </p:sp>
+      <p:pic xmlns:a="http://schemas.openxmlformats.org/drawingml/2006/main" xmlns:r="http://schemas.openxmlformats.org/officeDocument/2006/relationships">
+        <p:nvPicPr>
+          <p:cNvPr id="9" name="Figur: Stator med fyra poler vid 60 Hz; fältet " descr="Stator med fyra poler vid 60 Hz; fältet roterar med 1 800 r/min och rotorn med 1 746 r/min"/>
+          <p:cNvPicPr>
+            <a:picLocks noChangeAspect="1"/>
+          </p:cNvPicPr>
+          <p:nvPr/>
+        </p:nvPicPr>
+        <p:blipFill>
+          <a:blip r:embed="rId3"/>
+          <a:stretch>
+            <a:fillRect/>
+          </a:stretch>
+        </p:blipFill>
+        <p:spPr>
+          <a:xfrm>
+            <a:off x="4892040" y="1645920"/>
+            <a:ext cx="3886200" cy="3524019"/>
+          </a:xfrm>
+          <a:prstGeom prst="rect">
+            <a:avLst/>
+          </a:prstGeom>
+        </p:spPr>
+      </p:pic>
     </p:spTree>
     <p:extLst>
       <p:ext uri="{BB962C8B-B14F-4D97-AF65-F5344CB8AC3E}">

--- a/sjoskolan/vecka-43/aktuell/v43_02_Transformatorer_och_motorer_elev.pptx
+++ b/sjoskolan/vecka-43/aktuell/v43_02_Transformatorer_och_motorer_elev.pptx
@@ -7709,7 +7709,7 @@
                 <a:ea typeface="Calibri"/>
                 <a:cs typeface="Calibri"/>
               </a:rPr>
-              <a:t>Varför går en fyrpolig asynkronmotor ofta något långsammare än 1 500 r/min vid 50 Hz?</a:t>
+              <a:t>Varför går en fyrpolig asynkronmotor något långsammare än fältets synkrona varvtal?</a:t>
             </a:r>
           </a:p>
         </p:txBody>
@@ -9235,7 +9235,7 @@
                 <a:ea typeface="Calibri"/>
                 <a:cs typeface="Calibri"/>
               </a:rPr>
-              <a:t>Lagrad energi kan finnas i DC-mellanledet efter frånkoppling.</a:t>
+              <a:t>Vid 440 V nät ligger mellanledet på ca 620 V DC (440 · √2) och kan vara laddat efter frånkoppling.</a:t>
             </a:r>
           </a:p>
           <a:p xmlns:a="http://schemas.openxmlformats.org/drawingml/2006/main">
@@ -9259,7 +9259,7 @@
                 <a:ea typeface="Calibri"/>
                 <a:cs typeface="Calibri"/>
               </a:rPr>
-              <a:t>Tillverkarens väntetid och verifiering styr säkert arbete.</a:t>
+              <a:t>Vänta tillverkarens tid och mät DC+ mot DC− med avsedd provare före arbete.</a:t>
             </a:r>
           </a:p>
         </p:txBody>
@@ -11403,7 +11403,7 @@
                 <a:ea typeface="Calibri"/>
                 <a:cs typeface="Calibri"/>
               </a:rPr>
-              <a:t>Likriktare, DC-mellanled och växelriktare</a:t>
+              <a:t>Följ energin från nät till motor</a:t>
             </a:r>
           </a:p>
         </p:txBody>
@@ -11460,7 +11460,7 @@
                 <a:ea typeface="Calibri"/>
                 <a:cs typeface="Calibri"/>
               </a:rPr>
-              <a:t>Likriktaren omvandlar nät-AC till DC. Mellanledet lagrar energi. Växelriktaren formar motorutgången.</a:t>
+              <a:t>Varje del ändrar energins form. En av delarna lagrar energi mellan de två andra.</a:t>
             </a:r>
           </a:p>
         </p:txBody>
@@ -16860,7 +16860,7 @@
         <p:spPr>
           <a:xfrm>
             <a:off x="4892040" y="1645920"/>
-            <a:ext cx="3886200" cy="3524019"/>
+            <a:ext cx="3886200" cy="3705109"/>
           </a:xfrm>
           <a:prstGeom prst="rect">
             <a:avLst/>

--- a/sjoskolan/vecka-43/aktuell/v43_02_Transformatorer_och_motorer_elev.pptx
+++ b/sjoskolan/vecka-43/aktuell/v43_02_Transformatorer_och_motorer_elev.pptx
@@ -9235,7 +9235,7 @@
                 <a:ea typeface="Calibri"/>
                 <a:cs typeface="Calibri"/>
               </a:rPr>
-              <a:t>Vid 440 V nät ligger mellanledet på ca 620 V DC (440 · √2) och kan vara laddat efter frånkoppling.</a:t>
+              <a:t>Vid 440 V nät ligger mellanledet på ca 620 V DC och kan vara laddat efter frånkoppling.</a:t>
             </a:r>
           </a:p>
           <a:p xmlns:a="http://schemas.openxmlformats.org/drawingml/2006/main">
@@ -9259,7 +9259,7 @@
                 <a:ea typeface="Calibri"/>
                 <a:cs typeface="Calibri"/>
               </a:rPr>
-              <a:t>Vänta tillverkarens tid och mät DC+ mot DC− med avsedd provare före arbete.</a:t>
+              <a:t>Följ omriktarens säkerhetsanvisning: frånskilj alla energikällor, följ väntetiden och verifiera samtliga föreskrivna mätpunkter. Enbart DC+–DC− räcker inte.</a:t>
             </a:r>
           </a:p>
         </p:txBody>

--- a/sjoskolan/vecka-43/aktuell/v43_02_Transformatorer_och_motorer_elev.pptx
+++ b/sjoskolan/vecka-43/aktuell/v43_02_Transformatorer_och_motorer_elev.pptx
@@ -3899,7 +3899,51 @@
                 <a:ea typeface="Calibri"/>
                 <a:cs typeface="Calibri"/>
               </a:rPr>
-              <a:t>N₁ och N₂ är antal varv i respektive lindning. Index 1 är primärsidan och 2 sekundärsidan.</a:t>
+              <a:t>N</a:t>
+            </a:r>
+            <a:r>
+              <a:rPr sz="2100" b="0" baseline="-25000">
+                <a:solidFill>
+                  <a:srgbClr val="111111"/>
+                </a:solidFill>
+                <a:latin typeface="Calibri"/>
+                <a:ea typeface="Calibri"/>
+                <a:cs typeface="Calibri"/>
+              </a:rPr>
+              <a:t>1</a:t>
+            </a:r>
+            <a:r>
+              <a:rPr sz="2100" b="0">
+                <a:solidFill>
+                  <a:srgbClr val="111111"/>
+                </a:solidFill>
+                <a:latin typeface="Calibri"/>
+                <a:ea typeface="Calibri"/>
+                <a:cs typeface="Calibri"/>
+              </a:rPr>
+              <a:t> och N</a:t>
+            </a:r>
+            <a:r>
+              <a:rPr sz="2100" b="0" baseline="-25000">
+                <a:solidFill>
+                  <a:srgbClr val="111111"/>
+                </a:solidFill>
+                <a:latin typeface="Calibri"/>
+                <a:ea typeface="Calibri"/>
+                <a:cs typeface="Calibri"/>
+              </a:rPr>
+              <a:t>2</a:t>
+            </a:r>
+            <a:r>
+              <a:rPr sz="2100" b="0">
+                <a:solidFill>
+                  <a:srgbClr val="111111"/>
+                </a:solidFill>
+                <a:latin typeface="Calibri"/>
+                <a:ea typeface="Calibri"/>
+                <a:cs typeface="Calibri"/>
+              </a:rPr>
+              <a:t> är antalet varv i lindningarna; 1 är primärsidan och 2 sekundärsidan.</a:t>
             </a:r>
           </a:p>
         </p:txBody>
@@ -4013,7 +4057,51 @@
                 <a:ea typeface="Calibri"/>
                 <a:cs typeface="Calibri"/>
               </a:rPr>
-              <a:t>Arbetsgång: Beräkna varvförhållandet och multiplicera primärspänningen med det.</a:t>
+              <a:t>Arbetsgång: Räkna ut förhållandet N</a:t>
+            </a:r>
+            <a:r>
+              <a:rPr sz="2025" b="0" baseline="-25000">
+                <a:solidFill>
+                  <a:srgbClr val="111111"/>
+                </a:solidFill>
+                <a:latin typeface="Calibri"/>
+                <a:ea typeface="Calibri"/>
+                <a:cs typeface="Calibri"/>
+              </a:rPr>
+              <a:t>2</a:t>
+            </a:r>
+            <a:r>
+              <a:rPr sz="2025" b="0">
+                <a:solidFill>
+                  <a:srgbClr val="111111"/>
+                </a:solidFill>
+                <a:latin typeface="Calibri"/>
+                <a:ea typeface="Calibri"/>
+                <a:cs typeface="Calibri"/>
+              </a:rPr>
+              <a:t>/N</a:t>
+            </a:r>
+            <a:r>
+              <a:rPr sz="2025" b="0" baseline="-25000">
+                <a:solidFill>
+                  <a:srgbClr val="111111"/>
+                </a:solidFill>
+                <a:latin typeface="Calibri"/>
+                <a:ea typeface="Calibri"/>
+                <a:cs typeface="Calibri"/>
+              </a:rPr>
+              <a:t>1</a:t>
+            </a:r>
+            <a:r>
+              <a:rPr sz="2025" b="0">
+                <a:solidFill>
+                  <a:srgbClr val="111111"/>
+                </a:solidFill>
+                <a:latin typeface="Calibri"/>
+                <a:ea typeface="Calibri"/>
+                <a:cs typeface="Calibri"/>
+              </a:rPr>
+              <a:t> och multiplicera primärspänningen med det.</a:t>
             </a:r>
           </a:p>
         </p:txBody>
@@ -4590,7 +4678,172 @@
                 <a:ea typeface="Calibri"/>
                 <a:cs typeface="Calibri"/>
               </a:rPr>
-              <a:t>U₁I₁ = U₂I₂     I₁ = U₂I₂/U₁</a:t>
+              <a:t>U</a:t>
+            </a:r>
+            <a:r>
+              <a:rPr sz="2400" b="1" baseline="-25000">
+                <a:solidFill>
+                  <a:srgbClr val="064F91"/>
+                </a:solidFill>
+                <a:latin typeface="Calibri"/>
+                <a:ea typeface="Calibri"/>
+                <a:cs typeface="Calibri"/>
+              </a:rPr>
+              <a:t>1</a:t>
+            </a:r>
+            <a:r>
+              <a:rPr sz="2400" b="1">
+                <a:solidFill>
+                  <a:srgbClr val="064F91"/>
+                </a:solidFill>
+                <a:latin typeface="Calibri"/>
+                <a:ea typeface="Calibri"/>
+                <a:cs typeface="Calibri"/>
+              </a:rPr>
+              <a:t> · I</a:t>
+            </a:r>
+            <a:r>
+              <a:rPr sz="2400" b="1" baseline="-25000">
+                <a:solidFill>
+                  <a:srgbClr val="064F91"/>
+                </a:solidFill>
+                <a:latin typeface="Calibri"/>
+                <a:ea typeface="Calibri"/>
+                <a:cs typeface="Calibri"/>
+              </a:rPr>
+              <a:t>1</a:t>
+            </a:r>
+            <a:r>
+              <a:rPr sz="2400" b="1">
+                <a:solidFill>
+                  <a:srgbClr val="064F91"/>
+                </a:solidFill>
+                <a:latin typeface="Calibri"/>
+                <a:ea typeface="Calibri"/>
+                <a:cs typeface="Calibri"/>
+              </a:rPr>
+              <a:t> = U</a:t>
+            </a:r>
+            <a:r>
+              <a:rPr sz="2400" b="1" baseline="-25000">
+                <a:solidFill>
+                  <a:srgbClr val="064F91"/>
+                </a:solidFill>
+                <a:latin typeface="Calibri"/>
+                <a:ea typeface="Calibri"/>
+                <a:cs typeface="Calibri"/>
+              </a:rPr>
+              <a:t>2</a:t>
+            </a:r>
+            <a:r>
+              <a:rPr sz="2400" b="1">
+                <a:solidFill>
+                  <a:srgbClr val="064F91"/>
+                </a:solidFill>
+                <a:latin typeface="Calibri"/>
+                <a:ea typeface="Calibri"/>
+                <a:cs typeface="Calibri"/>
+              </a:rPr>
+              <a:t> · I</a:t>
+            </a:r>
+            <a:r>
+              <a:rPr sz="2400" b="1" baseline="-25000">
+                <a:solidFill>
+                  <a:srgbClr val="064F91"/>
+                </a:solidFill>
+                <a:latin typeface="Calibri"/>
+                <a:ea typeface="Calibri"/>
+                <a:cs typeface="Calibri"/>
+              </a:rPr>
+              <a:t>2</a:t>
+            </a:r>
+            <a:r>
+              <a:rPr sz="2400" b="1">
+                <a:solidFill>
+                  <a:srgbClr val="064F91"/>
+                </a:solidFill>
+                <a:latin typeface="Calibri"/>
+                <a:ea typeface="Calibri"/>
+                <a:cs typeface="Calibri"/>
+              </a:rPr>
+              <a:t>; I</a:t>
+            </a:r>
+            <a:r>
+              <a:rPr sz="2400" b="1" baseline="-25000">
+                <a:solidFill>
+                  <a:srgbClr val="064F91"/>
+                </a:solidFill>
+                <a:latin typeface="Calibri"/>
+                <a:ea typeface="Calibri"/>
+                <a:cs typeface="Calibri"/>
+              </a:rPr>
+              <a:t>1</a:t>
+            </a:r>
+            <a:r>
+              <a:rPr sz="2400" b="1">
+                <a:solidFill>
+                  <a:srgbClr val="064F91"/>
+                </a:solidFill>
+                <a:latin typeface="Calibri"/>
+                <a:ea typeface="Calibri"/>
+                <a:cs typeface="Calibri"/>
+              </a:rPr>
+              <a:t> = U</a:t>
+            </a:r>
+            <a:r>
+              <a:rPr sz="2400" b="1" baseline="-25000">
+                <a:solidFill>
+                  <a:srgbClr val="064F91"/>
+                </a:solidFill>
+                <a:latin typeface="Calibri"/>
+                <a:ea typeface="Calibri"/>
+                <a:cs typeface="Calibri"/>
+              </a:rPr>
+              <a:t>2</a:t>
+            </a:r>
+            <a:r>
+              <a:rPr sz="2400" b="1">
+                <a:solidFill>
+                  <a:srgbClr val="064F91"/>
+                </a:solidFill>
+                <a:latin typeface="Calibri"/>
+                <a:ea typeface="Calibri"/>
+                <a:cs typeface="Calibri"/>
+              </a:rPr>
+              <a:t> · I</a:t>
+            </a:r>
+            <a:r>
+              <a:rPr sz="2400" b="1" baseline="-25000">
+                <a:solidFill>
+                  <a:srgbClr val="064F91"/>
+                </a:solidFill>
+                <a:latin typeface="Calibri"/>
+                <a:ea typeface="Calibri"/>
+                <a:cs typeface="Calibri"/>
+              </a:rPr>
+              <a:t>2</a:t>
+            </a:r>
+            <a:r>
+              <a:rPr sz="2400" b="1">
+                <a:solidFill>
+                  <a:srgbClr val="064F91"/>
+                </a:solidFill>
+                <a:latin typeface="Calibri"/>
+                <a:ea typeface="Calibri"/>
+                <a:cs typeface="Calibri"/>
+              </a:rPr>
+              <a:t>/U</a:t>
+            </a:r>
+            <a:r>
+              <a:rPr sz="2400" b="1" baseline="-25000">
+                <a:solidFill>
+                  <a:srgbClr val="064F91"/>
+                </a:solidFill>
+                <a:latin typeface="Calibri"/>
+                <a:ea typeface="Calibri"/>
+                <a:cs typeface="Calibri"/>
+              </a:rPr>
+              <a:t>1</a:t>
             </a:r>
           </a:p>
         </p:txBody>
@@ -4647,7 +4900,7 @@
                 <a:ea typeface="Calibri"/>
                 <a:cs typeface="Calibri"/>
               </a:rPr>
-              <a:t>Produkterna är skenbar effekt i VA. För en resistiv last är de även aktiv effekt i W.</a:t>
+              <a:t>Spänning gånger ström ger skenbar effekt i VA, och för en resistiv last är det också den aktiva effekten i W.</a:t>
             </a:r>
           </a:p>
         </p:txBody>
@@ -4761,7 +5014,7 @@
                 <a:ea typeface="Calibri"/>
                 <a:cs typeface="Calibri"/>
               </a:rPr>
-              <a:t>Arbetsgång: Beräkna sekundärsidans VA och dividera med primärspänningen. Håll isär primär och sekundär.</a:t>
+              <a:t>Arbetsgång: Räkna ut effekten på sekundärsidan och dela med primärspänningen. Håll isär primär- och sekundärsidan.</a:t>
             </a:r>
           </a:p>
         </p:txBody>
@@ -5038,7 +5291,7 @@
                 <a:ea typeface="Calibri"/>
                 <a:cs typeface="Calibri"/>
               </a:rPr>
-              <a:t>En ideal transformator matar en resistiv last med 24 V och 3 A. Primärspänningen är 240 V. Bestäm primärströmmen.</a:t>
+              <a:t>En ideal transformator matar en resistiv last med 24 V och 3 A. Primärspänningen är 240 V. Bestäm effekten och primärströmmen.</a:t>
             </a:r>
           </a:p>
         </p:txBody>
@@ -5395,7 +5648,29 @@
                 <a:ea typeface="Calibri"/>
                 <a:cs typeface="Calibri"/>
               </a:rPr>
-              <a:t>nₛ är magnetfältets synkrona varvtal i r/min. f anges i Hz och p är antal poler.</a:t>
+              <a:t>n</a:t>
+            </a:r>
+            <a:r>
+              <a:rPr sz="2100" b="0" baseline="-25000">
+                <a:solidFill>
+                  <a:srgbClr val="111111"/>
+                </a:solidFill>
+                <a:latin typeface="Calibri"/>
+                <a:ea typeface="Calibri"/>
+                <a:cs typeface="Calibri"/>
+              </a:rPr>
+              <a:t>s</a:t>
+            </a:r>
+            <a:r>
+              <a:rPr sz="2100" b="0">
+                <a:solidFill>
+                  <a:srgbClr val="111111"/>
+                </a:solidFill>
+                <a:latin typeface="Calibri"/>
+                <a:ea typeface="Calibri"/>
+                <a:cs typeface="Calibri"/>
+              </a:rPr>
+              <a:t> är magnetfältets varvtal i r/min.</a:t>
             </a:r>
           </a:p>
         </p:txBody>
@@ -5452,7 +5727,7 @@
                 <a:ea typeface="Calibri"/>
                 <a:cs typeface="Calibri"/>
               </a:rPr>
-              <a:t>Förutsättningar: Fyrpolig motor: p = 4. Frekvens f = 50 Hz. p betyder inte polpar i denna formel.</a:t>
+              <a:t>Förutsättningar: Fyrpolig motor: p = 4. Frekvensen f = 50 Hz. I den här formeln är p antalet poler, inte polpar.</a:t>
             </a:r>
           </a:p>
         </p:txBody>
@@ -5509,7 +5784,7 @@
                 <a:ea typeface="Calibri"/>
                 <a:cs typeface="Calibri"/>
               </a:rPr>
-              <a:t>Arbetsgång: Multiplicera frekvensen med 120 och dividera med antalet poler.</a:t>
+              <a:t>Arbetsgång: Multiplicera frekvensen med 120 och dela med antalet poler.</a:t>
             </a:r>
           </a:p>
         </p:txBody>
@@ -6119,7 +6394,7 @@
                 <a:ea typeface="Calibri"/>
                 <a:cs typeface="Calibri"/>
               </a:rPr>
-              <a:t>Fler poler ger lägre synkront varvtal vid samma elektriska frekvens.</a:t>
+              <a:t>Fler poler ger lägre varvtal vid samma frekvens.</a:t>
             </a:r>
           </a:p>
         </p:txBody>
@@ -6233,7 +6508,7 @@
                 <a:ea typeface="Calibri"/>
                 <a:cs typeface="Calibri"/>
               </a:rPr>
-              <a:t>Arbetsgång: Sätt in sex som p. Ange r/min, eftersom formeln redan innehåller omräkningen till minuter.</a:t>
+              <a:t>Arbetsgång: Sätt in p = 6. Svaret blir i r/min, eftersom formeln redan räknar om till minuter.</a:t>
             </a:r>
           </a:p>
         </p:txBody>
@@ -6866,7 +7141,7 @@
                 <a:ea typeface="Calibri"/>
                 <a:cs typeface="Calibri"/>
               </a:rPr>
-              <a:t>n är rotorns verkliga varvtal. s är eftersläpning som andel av fältets varvtal.</a:t>
+              <a:t>n är rotorns verkliga varvtal.</a:t>
             </a:r>
           </a:p>
         </p:txBody>
@@ -6923,7 +7198,7 @@
                 <a:ea typeface="Calibri"/>
                 <a:cs typeface="Calibri"/>
               </a:rPr>
-              <a:t>Förutsättningar: f = 50 Hz, p = 4 och n = 1 440 r/min. Motorn arbetar i motordrift.</a:t>
+              <a:t>Förutsättningar: f = 50 Hz, p = 4 och n = 1 440 r/min. Motorn går som motor, alltså inte som generator.</a:t>
             </a:r>
           </a:p>
         </p:txBody>
@@ -6980,7 +7255,73 @@
                 <a:ea typeface="Calibri"/>
                 <a:cs typeface="Calibri"/>
               </a:rPr>
-              <a:t>Arbetsgång: Räkna nₛ först. Beräkna sedan skillnaden som andel av nₛ och omvandla till procent.</a:t>
+              <a:t>Arbetsgång: Räkna först ut n</a:t>
+            </a:r>
+            <a:r>
+              <a:rPr sz="2025" b="0" baseline="-25000">
+                <a:solidFill>
+                  <a:srgbClr val="111111"/>
+                </a:solidFill>
+                <a:latin typeface="Calibri"/>
+                <a:ea typeface="Calibri"/>
+                <a:cs typeface="Calibri"/>
+              </a:rPr>
+              <a:t>s</a:t>
+            </a:r>
+            <a:r>
+              <a:rPr sz="2025" b="0">
+                <a:solidFill>
+                  <a:srgbClr val="111111"/>
+                </a:solidFill>
+                <a:latin typeface="Calibri"/>
+                <a:ea typeface="Calibri"/>
+                <a:cs typeface="Calibri"/>
+              </a:rPr>
+              <a:t>, sedan skillnaden n</a:t>
+            </a:r>
+            <a:r>
+              <a:rPr sz="2025" b="0" baseline="-25000">
+                <a:solidFill>
+                  <a:srgbClr val="111111"/>
+                </a:solidFill>
+                <a:latin typeface="Calibri"/>
+                <a:ea typeface="Calibri"/>
+                <a:cs typeface="Calibri"/>
+              </a:rPr>
+              <a:t>s</a:t>
+            </a:r>
+            <a:r>
+              <a:rPr sz="2025" b="0">
+                <a:solidFill>
+                  <a:srgbClr val="111111"/>
+                </a:solidFill>
+                <a:latin typeface="Calibri"/>
+                <a:ea typeface="Calibri"/>
+                <a:cs typeface="Calibri"/>
+              </a:rPr>
+              <a:t> − n som andel av n</a:t>
+            </a:r>
+            <a:r>
+              <a:rPr sz="2025" b="0" baseline="-25000">
+                <a:solidFill>
+                  <a:srgbClr val="111111"/>
+                </a:solidFill>
+                <a:latin typeface="Calibri"/>
+                <a:ea typeface="Calibri"/>
+                <a:cs typeface="Calibri"/>
+              </a:rPr>
+              <a:t>s</a:t>
+            </a:r>
+            <a:r>
+              <a:rPr sz="2025" b="0">
+                <a:solidFill>
+                  <a:srgbClr val="111111"/>
+                </a:solidFill>
+                <a:latin typeface="Calibri"/>
+                <a:ea typeface="Calibri"/>
+                <a:cs typeface="Calibri"/>
+              </a:rPr>
+              <a:t>, och gör om till procent.</a:t>
             </a:r>
           </a:p>
         </p:txBody>
@@ -9968,7 +10309,7 @@
                 <a:ea typeface="Calibri"/>
                 <a:cs typeface="Calibri"/>
               </a:rPr>
-              <a:t>Formeln ger fältets varvtal. Rotorns verkliga varvtal kräver även eftersläpningen.</a:t>
+              <a:t>Formeln ger fältets varvtal. För rotorns varvtal skulle du också behöva eftersläpningen.</a:t>
             </a:r>
           </a:p>
         </p:txBody>
@@ -10025,7 +10366,7 @@
                 <a:ea typeface="Calibri"/>
                 <a:cs typeface="Calibri"/>
               </a:rPr>
-              <a:t>Förutsättningar: Fyra poler och matningsfrekvens 40 Hz. Uppgiften efterfrågar endast det synkrona varvtalet.</a:t>
+              <a:t>Förutsättningar: Fyra poler och frekvensen 40 Hz. Uppgiften gäller bara fältets varvtal.</a:t>
             </a:r>
           </a:p>
         </p:txBody>
@@ -10082,7 +10423,7 @@
                 <a:ea typeface="Calibri"/>
                 <a:cs typeface="Calibri"/>
               </a:rPr>
-              <a:t>Arbetsgång: Använd omriktarens 40 Hz och samma poltal. Blanda inte in ett antaget rotorvarvtal.</a:t>
+              <a:t>Arbetsgång: Sätt in 40 Hz och fyra poler.</a:t>
             </a:r>
           </a:p>
         </p:txBody>
@@ -10736,7 +11077,7 @@
                 <a:ea typeface="Calibri"/>
                 <a:cs typeface="Calibri"/>
               </a:rPr>
-              <a:t>Märkningen Δ/Y anger linjespänning för de två driftkopplingarna.</a:t>
+              <a:t>Märkningen Δ/Y anger nätspänningen för de två kopplingarna.</a:t>
             </a:r>
           </a:p>
         </p:txBody>
@@ -10850,7 +11191,7 @@
                 <a:ea typeface="Calibri"/>
                 <a:cs typeface="Calibri"/>
               </a:rPr>
-              <a:t>Arbetsgång: Jämför 400 V med motorernas Δ-märkspänning. Frågan gäller märkdrift, inte ett komplett startval.</a:t>
+              <a:t>Arbetsgång: Jämför 400 V med motorernas Δ-spänning. Frågan gäller normal drift, inte hur motorn ska startas.</a:t>
             </a:r>
           </a:p>
         </p:txBody>
@@ -11127,7 +11468,7 @@
                 <a:ea typeface="Calibri"/>
                 <a:cs typeface="Calibri"/>
               </a:rPr>
-              <a:t>Nätet är 400 V. Motor A är Δ/Y 230/400 V, motor B Δ/Y 400/690 V. Vilken är avsedd för Δ-märkdrift vid denna spänning?</a:t>
+              <a:t>Nätet är 400 V. Motor A är Δ/Y 230/400 V, motor B Δ/Y 400/690 V. Vilken av motorerna ska kopplas i Δ på det här nätet?</a:t>
             </a:r>
           </a:p>
         </p:txBody>
@@ -11517,7 +11858,7 @@
                 <a:ea typeface="Calibri"/>
                 <a:cs typeface="Calibri"/>
               </a:rPr>
-              <a:t>Förutsättningar: En vanlig spänningsmatad frekvensomriktare med dessa tre delar.</a:t>
+              <a:t>Förutsättningar: En vanlig frekvensomriktare med dessa tre delar.</a:t>
             </a:r>
           </a:p>
         </p:txBody>
@@ -12641,7 +12982,18 @@
                 <a:ea typeface="Calibri"/>
                 <a:cs typeface="Calibri"/>
               </a:rPr>
-              <a:t>η = </a:t>
+              <a:t>η = Paxel/P</a:t>
+            </a:r>
+            <a:r>
+              <a:rPr sz="2400" b="1" baseline="-25000">
+                <a:solidFill>
+                  <a:srgbClr val="064F91"/>
+                </a:solidFill>
+                <a:latin typeface="Calibri"/>
+                <a:ea typeface="Calibri"/>
+                <a:cs typeface="Calibri"/>
+              </a:rPr>
+              <a:t>in</a:t>
             </a:r>
             <a:r>
               <a:rPr sz="2400" b="1">
@@ -12652,7 +13004,7 @@
                 <a:ea typeface="Calibri"/>
                 <a:cs typeface="Calibri"/>
               </a:rPr>
-              <a:t>P</a:t>
+              <a:t>; Pförlust = P</a:t>
             </a:r>
             <a:r>
               <a:rPr sz="2400" b="1" baseline="-25000">
@@ -12663,7 +13015,7 @@
                 <a:ea typeface="Calibri"/>
                 <a:cs typeface="Calibri"/>
               </a:rPr>
-              <a:t>axel</a:t>
+              <a:t>in</a:t>
             </a:r>
             <a:r>
               <a:rPr sz="2400" b="1">
@@ -12674,62 +13026,7 @@
                 <a:ea typeface="Calibri"/>
                 <a:cs typeface="Calibri"/>
               </a:rPr>
-              <a:t>/Pᵢₙ     </a:t>
-            </a:r>
-            <a:r>
-              <a:rPr sz="2400" b="1">
-                <a:solidFill>
-                  <a:srgbClr val="064F91"/>
-                </a:solidFill>
-                <a:latin typeface="Calibri"/>
-                <a:ea typeface="Calibri"/>
-                <a:cs typeface="Calibri"/>
-              </a:rPr>
-              <a:t>P</a:t>
-            </a:r>
-            <a:r>
-              <a:rPr sz="2400" b="1" baseline="-25000">
-                <a:solidFill>
-                  <a:srgbClr val="064F91"/>
-                </a:solidFill>
-                <a:latin typeface="Calibri"/>
-                <a:ea typeface="Calibri"/>
-                <a:cs typeface="Calibri"/>
-              </a:rPr>
-              <a:t>förlust</a:t>
-            </a:r>
-            <a:r>
-              <a:rPr sz="2400" b="1">
-                <a:solidFill>
-                  <a:srgbClr val="064F91"/>
-                </a:solidFill>
-                <a:latin typeface="Calibri"/>
-                <a:ea typeface="Calibri"/>
-                <a:cs typeface="Calibri"/>
-              </a:rPr>
-              <a:t> = Pᵢₙ − </a:t>
-            </a:r>
-            <a:r>
-              <a:rPr sz="2400" b="1">
-                <a:solidFill>
-                  <a:srgbClr val="064F91"/>
-                </a:solidFill>
-                <a:latin typeface="Calibri"/>
-                <a:ea typeface="Calibri"/>
-                <a:cs typeface="Calibri"/>
-              </a:rPr>
-              <a:t>P</a:t>
-            </a:r>
-            <a:r>
-              <a:rPr sz="2400" b="1" baseline="-25000">
-                <a:solidFill>
-                  <a:srgbClr val="064F91"/>
-                </a:solidFill>
-                <a:latin typeface="Calibri"/>
-                <a:ea typeface="Calibri"/>
-                <a:cs typeface="Calibri"/>
-              </a:rPr>
-              <a:t>axel</a:t>
+              <a:t> − Paxel</a:t>
             </a:r>
           </a:p>
         </p:txBody>
@@ -12786,7 +13083,7 @@
                 <a:ea typeface="Calibri"/>
                 <a:cs typeface="Calibri"/>
               </a:rPr>
-              <a:t>η är verkningsgrad. Samma effektenhet ska användas i kvoten och subtraktionen.</a:t>
+              <a:t>Räkna i samma enhet hela tiden.</a:t>
             </a:r>
           </a:p>
         </p:txBody>
@@ -12843,7 +13140,18 @@
                 <a:ea typeface="Calibri"/>
                 <a:cs typeface="Calibri"/>
               </a:rPr>
-              <a:t>Förutsättningar: Pᵢₙ = 4,0 kW och </a:t>
+              <a:t>Förutsättningar: P</a:t>
+            </a:r>
+            <a:r>
+              <a:rPr sz="2025" b="0" baseline="-25000">
+                <a:solidFill>
+                  <a:srgbClr val="111111"/>
+                </a:solidFill>
+                <a:latin typeface="Calibri"/>
+                <a:ea typeface="Calibri"/>
+                <a:cs typeface="Calibri"/>
+              </a:rPr>
+              <a:t>in</a:t>
             </a:r>
             <a:r>
               <a:rPr sz="2025" b="0">
@@ -12854,29 +13162,7 @@
                 <a:ea typeface="Calibri"/>
                 <a:cs typeface="Calibri"/>
               </a:rPr>
-              <a:t>P</a:t>
-            </a:r>
-            <a:r>
-              <a:rPr sz="2025" b="0" baseline="-25000">
-                <a:solidFill>
-                  <a:srgbClr val="111111"/>
-                </a:solidFill>
-                <a:latin typeface="Calibri"/>
-                <a:ea typeface="Calibri"/>
-                <a:cs typeface="Calibri"/>
-              </a:rPr>
-              <a:t>axel</a:t>
-            </a:r>
-            <a:r>
-              <a:rPr sz="2025" b="0">
-                <a:solidFill>
-                  <a:srgbClr val="111111"/>
-                </a:solidFill>
-                <a:latin typeface="Calibri"/>
-                <a:ea typeface="Calibri"/>
-                <a:cs typeface="Calibri"/>
-              </a:rPr>
-              <a:t> = 3,4 kW gäller samma driftfall.</a:t>
+              <a:t> = 4,0 kW och Paxel = 3,4 kW gäller vid samma belastning.</a:t>
             </a:r>
           </a:p>
         </p:txBody>
@@ -12933,7 +13219,7 @@
                 <a:ea typeface="Calibri"/>
                 <a:cs typeface="Calibri"/>
               </a:rPr>
-              <a:t>Arbetsgång: Dividera uteffekt med inmatning och multiplicera med 100 för procent. Beräkna förlusten separat.</a:t>
+              <a:t>Arbetsgång: Dela axeleffekten med den tillförda effekten och multiplicera med 100 för procent. Räkna förlusten för sig.</a:t>
             </a:r>
           </a:p>
         </p:txBody>
@@ -13210,7 +13496,7 @@
                 <a:ea typeface="Calibri"/>
                 <a:cs typeface="Calibri"/>
               </a:rPr>
-              <a:t>En motor tar 4,0 kW elektriskt och ger 3,4 kW på axeln. Bestäm verkningsgrad och förlust.</a:t>
+              <a:t>En motor tar 4,0 kW elektriskt och ger 3,4 kW på axeln. Bestäm verkningsgraden och förlusten.</a:t>
             </a:r>
           </a:p>
         </p:txBody>
@@ -13543,7 +13829,7 @@
                 <a:ea typeface="Calibri"/>
                 <a:cs typeface="Calibri"/>
               </a:rPr>
-              <a:t>Mekanisk belastning, elektrisk matning och skyddsinställning kan påverka motorströmmen.</a:t>
+              <a:t>Den mekaniska lasten, matningen och skyddets inställning påverkar motorströmmen.</a:t>
             </a:r>
           </a:p>
         </p:txBody>
@@ -13600,7 +13886,7 @@
                 <a:ea typeface="Calibri"/>
                 <a:cs typeface="Calibri"/>
               </a:rPr>
-              <a:t>Förutsättningar: Motorn löser upprepade gånger. Inga mätdata visar ännu vilken orsak som gäller.</a:t>
+              <a:t>Förutsättningar: Skyddet löser ut gång på gång. Det finns inga mätvärden som visar orsaken än.</a:t>
             </a:r>
           </a:p>
         </p:txBody>
@@ -13657,7 +13943,7 @@
                 <a:ea typeface="Calibri"/>
                 <a:cs typeface="Calibri"/>
               </a:rPr>
-              <a:t>Arbetsgång: Formulera två skilda hypoteser och ange data som kan skilja dem, exempelvis fasströmmar och lastförlopp.</a:t>
+              <a:t>Arbetsgång: Formulera två olika hypoteser och ange vilka data som kan skilja dem åt, till exempel fasströmmarna och hur lasten varierar.</a:t>
             </a:r>
           </a:p>
         </p:txBody>
@@ -13934,7 +14220,7 @@
                 <a:ea typeface="Calibri"/>
                 <a:cs typeface="Calibri"/>
               </a:rPr>
-              <a:t>En motor löser upprepade gånger på överlast. Föreslå två olika felområden och vilken information som kan skilja dem.</a:t>
+              <a:t>Överlastskyddet för en motor löser ut gång på gång. Föreslå två olika möjliga orsaker och vilken information som kan skilja dem åt.</a:t>
             </a:r>
           </a:p>
         </p:txBody>

--- a/sjoskolan/vecka-43/aktuell/v43_02_Transformatorer_och_motorer_elev.pptx
+++ b/sjoskolan/vecka-43/aktuell/v43_02_Transformatorer_och_motorer_elev.pptx
@@ -17308,7 +17308,7 @@
                 <a:ea typeface="Calibri"/>
                 <a:cs typeface="Calibri"/>
               </a:rPr>
-              <a:t>Ideal enfastransformator: U₁ = 120 V, N₁ = 600, N₂ = 120 varv. I₂ = 2 A.</a:t>
+              <a:t>Ideal styrtransformator till en kontaktors manöverkrets: U₁ = 230 V, N₁ = 460, N₂ = 48 varv. I₂ = 2 A.</a:t>
             </a:r>
           </a:p>
         </p:txBody>
@@ -17422,7 +17422,7 @@
                 <a:ea typeface="Calibri"/>
                 <a:cs typeface="Calibri"/>
               </a:rPr>
-              <a:t>1. U₂ = 120 · 120/600 = 24 V.</a:t>
+              <a:t>1. U₂ = 230 · 48/460 = 24 V.</a:t>
             </a:r>
           </a:p>
           <a:p xmlns:a="http://schemas.openxmlformats.org/drawingml/2006/main">
@@ -17468,7 +17468,7 @@
                 <a:ea typeface="Calibri"/>
                 <a:cs typeface="Calibri"/>
               </a:rPr>
-              <a:t>3. I₁ = 48/120 = 0,40 A.</a:t>
+              <a:t>3. I₁ = 48/230 ≈ 0,21 A.</a:t>
             </a:r>
           </a:p>
         </p:txBody>
@@ -17525,7 +17525,7 @@
                 <a:ea typeface="Calibri"/>
                 <a:cs typeface="Calibri"/>
               </a:rPr>
-              <a:t>Kontroll: 120 · 0,40 = 24 · 2 = 48 VA. Modellen försummar magnetiseringsström och förluster.</a:t>
+              <a:t>Kontroll: 230 · 0,21 ≈ 24 · 2 = 48 VA. Modellen försummar magnetiseringsström och förluster.</a:t>
             </a:r>
           </a:p>
         </p:txBody>

--- a/sjoskolan/vecka-43/aktuell/v43_02_Transformatorer_och_motorer_elev.pptx
+++ b/sjoskolan/vecka-43/aktuell/v43_02_Transformatorer_och_motorer_elev.pptx
@@ -4957,7 +4957,73 @@
                 <a:ea typeface="Calibri"/>
                 <a:cs typeface="Calibri"/>
               </a:rPr>
-              <a:t>Förutsättningar: Ideal enfastransformator med resistiv last, PF = 1. U₂ = 24 V, I₂ = 3 A och U₁ = 240 V. Förluster försummas.</a:t>
+              <a:t>Förutsättningar: Ideal enfastransformator med resistiv last, PF = 1. U</a:t>
+            </a:r>
+            <a:r>
+              <a:rPr sz="2025" b="0" baseline="-25000">
+                <a:solidFill>
+                  <a:srgbClr val="111111"/>
+                </a:solidFill>
+                <a:latin typeface="Calibri"/>
+                <a:ea typeface="Calibri"/>
+                <a:cs typeface="Calibri"/>
+              </a:rPr>
+              <a:t>2</a:t>
+            </a:r>
+            <a:r>
+              <a:rPr sz="2025" b="0">
+                <a:solidFill>
+                  <a:srgbClr val="111111"/>
+                </a:solidFill>
+                <a:latin typeface="Calibri"/>
+                <a:ea typeface="Calibri"/>
+                <a:cs typeface="Calibri"/>
+              </a:rPr>
+              <a:t> = 24 V, I</a:t>
+            </a:r>
+            <a:r>
+              <a:rPr sz="2025" b="0" baseline="-25000">
+                <a:solidFill>
+                  <a:srgbClr val="111111"/>
+                </a:solidFill>
+                <a:latin typeface="Calibri"/>
+                <a:ea typeface="Calibri"/>
+                <a:cs typeface="Calibri"/>
+              </a:rPr>
+              <a:t>2</a:t>
+            </a:r>
+            <a:r>
+              <a:rPr sz="2025" b="0">
+                <a:solidFill>
+                  <a:srgbClr val="111111"/>
+                </a:solidFill>
+                <a:latin typeface="Calibri"/>
+                <a:ea typeface="Calibri"/>
+                <a:cs typeface="Calibri"/>
+              </a:rPr>
+              <a:t> = 3 A och U</a:t>
+            </a:r>
+            <a:r>
+              <a:rPr sz="2025" b="0" baseline="-25000">
+                <a:solidFill>
+                  <a:srgbClr val="111111"/>
+                </a:solidFill>
+                <a:latin typeface="Calibri"/>
+                <a:ea typeface="Calibri"/>
+                <a:cs typeface="Calibri"/>
+              </a:rPr>
+              <a:t>1</a:t>
+            </a:r>
+            <a:r>
+              <a:rPr sz="2025" b="0">
+                <a:solidFill>
+                  <a:srgbClr val="111111"/>
+                </a:solidFill>
+                <a:latin typeface="Calibri"/>
+                <a:ea typeface="Calibri"/>
+                <a:cs typeface="Calibri"/>
+              </a:rPr>
+              <a:t> = 230 V. Förluster försummas.</a:t>
             </a:r>
           </a:p>
         </p:txBody>
@@ -5291,7 +5357,7 @@
                 <a:ea typeface="Calibri"/>
                 <a:cs typeface="Calibri"/>
               </a:rPr>
-              <a:t>En ideal transformator matar en resistiv last med 24 V och 3 A. Primärspänningen är 240 V. Bestäm effekten och primärströmmen.</a:t>
+              <a:t>En ideal transformator matar en resistiv last med 24 V och 3 A. Primärspänningen är 230 V. Bestäm effekten och primärströmmen.</a:t>
             </a:r>
           </a:p>
         </p:txBody>
@@ -5414,7 +5480,7 @@
       </p:sp>
       <p:pic xmlns:a="http://schemas.openxmlformats.org/drawingml/2006/main" xmlns:r="http://schemas.openxmlformats.org/officeDocument/2006/relationships">
         <p:nvPicPr>
-          <p:cNvPr id="9" name="Figur: Ideal transformator med last: U1 = 240 V" descr="Ideal transformator med last: U1 = 240 V, U2 = 24 V och I2 = 3 A; I1 okänd"/>
+          <p:cNvPr id="9" name="Figur: Ideal transformator med last: U1 = 230 V" descr="Ideal transformator med last: U1 = 230 V, U2 = 24 V och I2 = 3 A; I1 okänd"/>
           <p:cNvPicPr>
             <a:picLocks noChangeAspect="1"/>
           </p:cNvPicPr>

--- a/sjoskolan/vecka-43/aktuell/v43_02_Transformatorer_och_motorer_elev.pptx
+++ b/sjoskolan/vecka-43/aktuell/v43_02_Transformatorer_och_motorer_elev.pptx
@@ -3785,7 +3785,7 @@
                 <a:ea typeface="Calibri"/>
                 <a:cs typeface="Calibri"/>
               </a:rPr>
-              <a:t>Stöd till övning 1</a:t>
+              <a:t>Stöd till övning 2.1</a:t>
             </a:r>
           </a:p>
         </p:txBody>
@@ -4262,7 +4262,7 @@
                 <a:ea typeface="Calibri"/>
                 <a:cs typeface="Calibri"/>
               </a:rPr>
-              <a:t>Övning 1</a:t>
+              <a:t>Övning 2.1</a:t>
             </a:r>
           </a:p>
         </p:txBody>
@@ -4621,7 +4621,7 @@
                 <a:ea typeface="Calibri"/>
                 <a:cs typeface="Calibri"/>
               </a:rPr>
-              <a:t>Stöd till övning 2</a:t>
+              <a:t>Stöd till övning 2.2</a:t>
             </a:r>
           </a:p>
         </p:txBody>
@@ -5241,7 +5241,7 @@
                 <a:ea typeface="Calibri"/>
                 <a:cs typeface="Calibri"/>
               </a:rPr>
-              <a:t>Övning 2</a:t>
+              <a:t>Övning 2.2</a:t>
             </a:r>
           </a:p>
         </p:txBody>
@@ -5600,7 +5600,7 @@
                 <a:ea typeface="Calibri"/>
                 <a:cs typeface="Calibri"/>
               </a:rPr>
-              <a:t>Stöd till övning 3</a:t>
+              <a:t>Stöd till övning 2.3</a:t>
             </a:r>
           </a:p>
         </p:txBody>
@@ -6011,7 +6011,7 @@
                 <a:ea typeface="Calibri"/>
                 <a:cs typeface="Calibri"/>
               </a:rPr>
-              <a:t>Övning 3</a:t>
+              <a:t>Övning 2.3</a:t>
             </a:r>
           </a:p>
         </p:txBody>
@@ -6346,7 +6346,7 @@
                 <a:ea typeface="Calibri"/>
                 <a:cs typeface="Calibri"/>
               </a:rPr>
-              <a:t>Stöd till övning 4</a:t>
+              <a:t>Stöd till övning 2.4</a:t>
             </a:r>
           </a:p>
         </p:txBody>
@@ -6735,7 +6735,7 @@
                 <a:ea typeface="Calibri"/>
                 <a:cs typeface="Calibri"/>
               </a:rPr>
-              <a:t>Övning 4</a:t>
+              <a:t>Övning 2.4</a:t>
             </a:r>
           </a:p>
         </p:txBody>
@@ -7070,7 +7070,7 @@
                 <a:ea typeface="Calibri"/>
                 <a:cs typeface="Calibri"/>
               </a:rPr>
-              <a:t>Stöd till övning 5</a:t>
+              <a:t>Stöd till övning 2.5</a:t>
             </a:r>
           </a:p>
         </p:txBody>
@@ -7548,7 +7548,7 @@
                 <a:ea typeface="Calibri"/>
                 <a:cs typeface="Calibri"/>
               </a:rPr>
-              <a:t>Övning 5</a:t>
+              <a:t>Övning 2.5</a:t>
             </a:r>
           </a:p>
         </p:txBody>
@@ -10261,7 +10261,7 @@
                 <a:ea typeface="Calibri"/>
                 <a:cs typeface="Calibri"/>
               </a:rPr>
-              <a:t>Stöd till övning 6</a:t>
+              <a:t>Stöd till övning 2.6</a:t>
             </a:r>
           </a:p>
         </p:txBody>
@@ -10650,7 +10650,7 @@
                 <a:ea typeface="Calibri"/>
                 <a:cs typeface="Calibri"/>
               </a:rPr>
-              <a:t>Övning 6</a:t>
+              <a:t>Övning 2.6</a:t>
             </a:r>
           </a:p>
         </p:txBody>
@@ -10985,7 +10985,7 @@
                 <a:ea typeface="Calibri"/>
                 <a:cs typeface="Calibri"/>
               </a:rPr>
-              <a:t>Stöd till övning 7</a:t>
+              <a:t>Stöd till övning 2.7</a:t>
             </a:r>
           </a:p>
         </p:txBody>
@@ -11418,7 +11418,7 @@
                 <a:ea typeface="Calibri"/>
                 <a:cs typeface="Calibri"/>
               </a:rPr>
-              <a:t>Övning 7</a:t>
+              <a:t>Övning 2.7</a:t>
             </a:r>
           </a:p>
         </p:txBody>
@@ -11753,7 +11753,7 @@
                 <a:ea typeface="Calibri"/>
                 <a:cs typeface="Calibri"/>
               </a:rPr>
-              <a:t>Stöd till övning 8</a:t>
+              <a:t>Stöd till övning 2.8</a:t>
             </a:r>
           </a:p>
         </p:txBody>
@@ -12656,7 +12656,7 @@
                 <a:ea typeface="Calibri"/>
                 <a:cs typeface="Calibri"/>
               </a:rPr>
-              <a:t>Övning 8</a:t>
+              <a:t>Övning 2.8</a:t>
             </a:r>
           </a:p>
         </p:txBody>
@@ -12991,7 +12991,7 @@
                 <a:ea typeface="Calibri"/>
                 <a:cs typeface="Calibri"/>
               </a:rPr>
-              <a:t>Stöd till övning 9</a:t>
+              <a:t>Stöd till övning 2.9</a:t>
             </a:r>
           </a:p>
         </p:txBody>
@@ -13446,7 +13446,7 @@
                 <a:ea typeface="Calibri"/>
                 <a:cs typeface="Calibri"/>
               </a:rPr>
-              <a:t>Övning 9</a:t>
+              <a:t>Övning 2.9</a:t>
             </a:r>
           </a:p>
         </p:txBody>
@@ -13781,7 +13781,7 @@
                 <a:ea typeface="Calibri"/>
                 <a:cs typeface="Calibri"/>
               </a:rPr>
-              <a:t>Stöd till övning 10</a:t>
+              <a:t>Stöd till övning 2.10</a:t>
             </a:r>
           </a:p>
         </p:txBody>
@@ -14170,7 +14170,7 @@
                 <a:ea typeface="Calibri"/>
                 <a:cs typeface="Calibri"/>
               </a:rPr>
-              <a:t>Övning 10</a:t>
+              <a:t>Övning 2.10</a:t>
             </a:r>
           </a:p>
         </p:txBody>

--- a/sjoskolan/vecka-43/aktuell/v43_02_Transformatorer_och_motorer_elev.pptx
+++ b/sjoskolan/vecka-43/aktuell/v43_02_Transformatorer_och_motorer_elev.pptx
@@ -3512,6 +3512,10 @@
             <a:noFill/>
           </a:ln>
         </p:spPr>
+        <p:txBody xmlns:a="http://schemas.openxmlformats.org/drawingml/2006/main">
+          <a:bodyPr/>
+          <a:p/>
+        </p:txBody>
       </p:sp>
       <p:sp>
         <p:nvSpPr>
@@ -8442,7 +8446,7 @@
                 <a:ea typeface="Calibri"/>
                 <a:cs typeface="Calibri"/>
               </a:rPr>
-              <a:t>Teori och exempel följs av övning 6–10.</a:t>
+              <a:t>Teori och exempel följs av övning 2.6–2.10.</a:t>
             </a:r>
           </a:p>
           <a:p xmlns:a="http://schemas.openxmlformats.org/drawingml/2006/main">
@@ -12278,7 +12282,7 @@
                 <a:ea typeface="Calibri"/>
                 <a:cs typeface="Calibri"/>
               </a:rPr>
-              <a:t>15 min övning 1, 2, 4, 5 min återkoppling</a:t>
+              <a:t>15 min övning 2.1, 2.2 och 2.4, 5 min återkoppling</a:t>
             </a:r>
           </a:p>
         </p:txBody>
@@ -12392,7 +12396,7 @@
                 <a:ea typeface="Calibri"/>
                 <a:cs typeface="Calibri"/>
               </a:rPr>
-              <a:t>20 min teori och exempel, 15 min övning 6, 7, 8</a:t>
+              <a:t>20 min teori och exempel, 15 min övning 2.6, 2.7 och 2.8</a:t>
             </a:r>
           </a:p>
           <a:p xmlns:a="http://schemas.openxmlformats.org/drawingml/2006/main">

--- a/sjoskolan/vecka-43/aktuell/v43_02_Transformatorer_och_motorer_elev.pptx
+++ b/sjoskolan/vecka-43/aktuell/v43_02_Transformatorer_och_motorer_elev.pptx
@@ -13052,7 +13052,7 @@
                 <a:ea typeface="Calibri"/>
                 <a:cs typeface="Calibri"/>
               </a:rPr>
-              <a:t>η = Paxel/P</a:t>
+              <a:t>η = P</a:t>
             </a:r>
             <a:r>
               <a:rPr sz="2400" b="1" baseline="-25000">
@@ -13063,6 +13063,28 @@
                 <a:ea typeface="Calibri"/>
                 <a:cs typeface="Calibri"/>
               </a:rPr>
+              <a:t>axel</a:t>
+            </a:r>
+            <a:r>
+              <a:rPr sz="2400" b="1">
+                <a:solidFill>
+                  <a:srgbClr val="064F91"/>
+                </a:solidFill>
+                <a:latin typeface="Calibri"/>
+                <a:ea typeface="Calibri"/>
+                <a:cs typeface="Calibri"/>
+              </a:rPr>
+              <a:t>/P</a:t>
+            </a:r>
+            <a:r>
+              <a:rPr sz="2400" b="1" baseline="-25000">
+                <a:solidFill>
+                  <a:srgbClr val="064F91"/>
+                </a:solidFill>
+                <a:latin typeface="Calibri"/>
+                <a:ea typeface="Calibri"/>
+                <a:cs typeface="Calibri"/>
+              </a:rPr>
               <a:t>in</a:t>
             </a:r>
             <a:r>
@@ -13096,7 +13118,18 @@
                 <a:ea typeface="Calibri"/>
                 <a:cs typeface="Calibri"/>
               </a:rPr>
-              <a:t> − Paxel</a:t>
+              <a:t> − P</a:t>
+            </a:r>
+            <a:r>
+              <a:rPr sz="2400" b="1" baseline="-25000">
+                <a:solidFill>
+                  <a:srgbClr val="064F91"/>
+                </a:solidFill>
+                <a:latin typeface="Calibri"/>
+                <a:ea typeface="Calibri"/>
+                <a:cs typeface="Calibri"/>
+              </a:rPr>
+              <a:t>axel</a:t>
             </a:r>
           </a:p>
         </p:txBody>
@@ -13232,7 +13265,29 @@
                 <a:ea typeface="Calibri"/>
                 <a:cs typeface="Calibri"/>
               </a:rPr>
-              <a:t> = 4,0 kW och Paxel = 3,4 kW gäller vid samma belastning.</a:t>
+              <a:t> = 4,0 kW och P</a:t>
+            </a:r>
+            <a:r>
+              <a:rPr sz="2025" b="0" baseline="-25000">
+                <a:solidFill>
+                  <a:srgbClr val="111111"/>
+                </a:solidFill>
+                <a:latin typeface="Calibri"/>
+                <a:ea typeface="Calibri"/>
+                <a:cs typeface="Calibri"/>
+              </a:rPr>
+              <a:t>axel</a:t>
+            </a:r>
+            <a:r>
+              <a:rPr sz="2025" b="0">
+                <a:solidFill>
+                  <a:srgbClr val="111111"/>
+                </a:solidFill>
+                <a:latin typeface="Calibri"/>
+                <a:ea typeface="Calibri"/>
+                <a:cs typeface="Calibri"/>
+              </a:rPr>
+              <a:t> = 3,4 kW gäller vid samma belastning.</a:t>
             </a:r>
           </a:p>
         </p:txBody>

--- a/sjoskolan/vecka-43/aktuell/v43_02_Transformatorer_och_motorer_elev.pptx
+++ b/sjoskolan/vecka-43/aktuell/v43_02_Transformatorer_och_motorer_elev.pptx
@@ -13096,7 +13096,29 @@
                 <a:ea typeface="Calibri"/>
                 <a:cs typeface="Calibri"/>
               </a:rPr>
-              <a:t>; Pförlust = P</a:t>
+              <a:t>; P</a:t>
+            </a:r>
+            <a:r>
+              <a:rPr sz="2400" b="1" baseline="-25000">
+                <a:solidFill>
+                  <a:srgbClr val="064F91"/>
+                </a:solidFill>
+                <a:latin typeface="Calibri"/>
+                <a:ea typeface="Calibri"/>
+                <a:cs typeface="Calibri"/>
+              </a:rPr>
+              <a:t>förlust</a:t>
+            </a:r>
+            <a:r>
+              <a:rPr sz="2400" b="1">
+                <a:solidFill>
+                  <a:srgbClr val="064F91"/>
+                </a:solidFill>
+                <a:latin typeface="Calibri"/>
+                <a:ea typeface="Calibri"/>
+                <a:cs typeface="Calibri"/>
+              </a:rPr>
+              <a:t> = P</a:t>
             </a:r>
             <a:r>
               <a:rPr sz="2400" b="1" baseline="-25000">

--- a/sjoskolan/vecka-43/aktuell/v43_02_Transformatorer_och_motorer_elev.pptx
+++ b/sjoskolan/vecka-43/aktuell/v43_02_Transformatorer_och_motorer_elev.pptx
@@ -5661,7 +5661,29 @@
                 <a:ea typeface="Calibri"/>
                 <a:cs typeface="Calibri"/>
               </a:rPr>
-              <a:t>nₛ = 120f/p</a:t>
+              <a:t>n</a:t>
+            </a:r>
+            <a:r>
+              <a:rPr sz="2400" b="1" baseline="-25000">
+                <a:solidFill>
+                  <a:srgbClr val="064F91"/>
+                </a:solidFill>
+                <a:latin typeface="Calibri"/>
+                <a:ea typeface="Calibri"/>
+                <a:cs typeface="Calibri"/>
+              </a:rPr>
+              <a:t>s</a:t>
+            </a:r>
+            <a:r>
+              <a:rPr sz="2400" b="1">
+                <a:solidFill>
+                  <a:srgbClr val="064F91"/>
+                </a:solidFill>
+                <a:latin typeface="Calibri"/>
+                <a:ea typeface="Calibri"/>
+                <a:cs typeface="Calibri"/>
+              </a:rPr>
+              <a:t> = 120f/p</a:t>
             </a:r>
           </a:p>
         </p:txBody>
@@ -6131,7 +6153,29 @@
                 <a:ea typeface="Calibri"/>
                 <a:cs typeface="Calibri"/>
               </a:rPr>
-              <a:t>Beräkna nₛ för en fyrpolig motor vid 50 Hz.</a:t>
+              <a:t>Beräkna n</a:t>
+            </a:r>
+            <a:r>
+              <a:rPr sz="2400" b="0" baseline="-25000">
+                <a:solidFill>
+                  <a:srgbClr val="111111"/>
+                </a:solidFill>
+                <a:latin typeface="Calibri"/>
+                <a:ea typeface="Calibri"/>
+                <a:cs typeface="Calibri"/>
+              </a:rPr>
+              <a:t>s</a:t>
+            </a:r>
+            <a:r>
+              <a:rPr sz="2400" b="0">
+                <a:solidFill>
+                  <a:srgbClr val="111111"/>
+                </a:solidFill>
+                <a:latin typeface="Calibri"/>
+                <a:ea typeface="Calibri"/>
+                <a:cs typeface="Calibri"/>
+              </a:rPr>
+              <a:t> för en fyrpolig motor vid 50 Hz.</a:t>
             </a:r>
           </a:p>
         </p:txBody>
@@ -6407,7 +6451,29 @@
                 <a:ea typeface="Calibri"/>
                 <a:cs typeface="Calibri"/>
               </a:rPr>
-              <a:t>nₛ = 120f/p</a:t>
+              <a:t>n</a:t>
+            </a:r>
+            <a:r>
+              <a:rPr sz="2400" b="1" baseline="-25000">
+                <a:solidFill>
+                  <a:srgbClr val="064F91"/>
+                </a:solidFill>
+                <a:latin typeface="Calibri"/>
+                <a:ea typeface="Calibri"/>
+                <a:cs typeface="Calibri"/>
+              </a:rPr>
+              <a:t>s</a:t>
+            </a:r>
+            <a:r>
+              <a:rPr sz="2400" b="1">
+                <a:solidFill>
+                  <a:srgbClr val="064F91"/>
+                </a:solidFill>
+                <a:latin typeface="Calibri"/>
+                <a:ea typeface="Calibri"/>
+                <a:cs typeface="Calibri"/>
+              </a:rPr>
+              <a:t> = 120f/p</a:t>
             </a:r>
           </a:p>
         </p:txBody>
@@ -7131,7 +7197,29 @@
                 <a:ea typeface="Calibri"/>
                 <a:cs typeface="Calibri"/>
               </a:rPr>
-              <a:t>nₛ = 120f/p</a:t>
+              <a:t>n</a:t>
+            </a:r>
+            <a:r>
+              <a:rPr sz="2400" b="1" baseline="-25000">
+                <a:solidFill>
+                  <a:srgbClr val="064F91"/>
+                </a:solidFill>
+                <a:latin typeface="Calibri"/>
+                <a:ea typeface="Calibri"/>
+                <a:cs typeface="Calibri"/>
+              </a:rPr>
+              <a:t>s</a:t>
+            </a:r>
+            <a:r>
+              <a:rPr sz="2400" b="1">
+                <a:solidFill>
+                  <a:srgbClr val="064F91"/>
+                </a:solidFill>
+                <a:latin typeface="Calibri"/>
+                <a:ea typeface="Calibri"/>
+                <a:cs typeface="Calibri"/>
+              </a:rPr>
+              <a:t> = 120f/p</a:t>
             </a:r>
           </a:p>
           <a:p xmlns:a="http://schemas.openxmlformats.org/drawingml/2006/main">
@@ -7154,7 +7242,40 @@
                 <a:ea typeface="Calibri"/>
                 <a:cs typeface="Calibri"/>
               </a:rPr>
-              <a:t>s% = 100 · (nₛ − n)/nₛ</a:t>
+              <a:t>s% = 100 · (n</a:t>
+            </a:r>
+            <a:r>
+              <a:rPr sz="2400" b="1" baseline="-25000">
+                <a:solidFill>
+                  <a:srgbClr val="064F91"/>
+                </a:solidFill>
+                <a:latin typeface="Calibri"/>
+                <a:ea typeface="Calibri"/>
+                <a:cs typeface="Calibri"/>
+              </a:rPr>
+              <a:t>s</a:t>
+            </a:r>
+            <a:r>
+              <a:rPr sz="2400" b="1">
+                <a:solidFill>
+                  <a:srgbClr val="064F91"/>
+                </a:solidFill>
+                <a:latin typeface="Calibri"/>
+                <a:ea typeface="Calibri"/>
+                <a:cs typeface="Calibri"/>
+              </a:rPr>
+              <a:t> − n)/n</a:t>
+            </a:r>
+            <a:r>
+              <a:rPr sz="2400" b="1" baseline="-25000">
+                <a:solidFill>
+                  <a:srgbClr val="064F91"/>
+                </a:solidFill>
+                <a:latin typeface="Calibri"/>
+                <a:ea typeface="Calibri"/>
+                <a:cs typeface="Calibri"/>
+              </a:rPr>
+              <a:t>s</a:t>
             </a:r>
           </a:p>
         </p:txBody>
@@ -9945,7 +10066,62 @@
                 <a:ea typeface="Calibri"/>
                 <a:cs typeface="Calibri"/>
               </a:rPr>
-              <a:t>nₛ = 120f/p     s% = 100(nₛ − n)/nₛ</a:t>
+              <a:t>n</a:t>
+            </a:r>
+            <a:r>
+              <a:rPr sz="2325" b="1" baseline="-25000">
+                <a:solidFill>
+                  <a:srgbClr val="064F91"/>
+                </a:solidFill>
+                <a:latin typeface="Calibri"/>
+                <a:ea typeface="Calibri"/>
+                <a:cs typeface="Calibri"/>
+              </a:rPr>
+              <a:t>s</a:t>
+            </a:r>
+            <a:r>
+              <a:rPr sz="2325" b="1">
+                <a:solidFill>
+                  <a:srgbClr val="064F91"/>
+                </a:solidFill>
+                <a:latin typeface="Calibri"/>
+                <a:ea typeface="Calibri"/>
+                <a:cs typeface="Calibri"/>
+              </a:rPr>
+              <a:t> = 120f/p     s% = 100(n</a:t>
+            </a:r>
+            <a:r>
+              <a:rPr sz="2325" b="1" baseline="-25000">
+                <a:solidFill>
+                  <a:srgbClr val="064F91"/>
+                </a:solidFill>
+                <a:latin typeface="Calibri"/>
+                <a:ea typeface="Calibri"/>
+                <a:cs typeface="Calibri"/>
+              </a:rPr>
+              <a:t>s</a:t>
+            </a:r>
+            <a:r>
+              <a:rPr sz="2325" b="1">
+                <a:solidFill>
+                  <a:srgbClr val="064F91"/>
+                </a:solidFill>
+                <a:latin typeface="Calibri"/>
+                <a:ea typeface="Calibri"/>
+                <a:cs typeface="Calibri"/>
+              </a:rPr>
+              <a:t> − n)/n</a:t>
+            </a:r>
+            <a:r>
+              <a:rPr sz="2325" b="1" baseline="-25000">
+                <a:solidFill>
+                  <a:srgbClr val="064F91"/>
+                </a:solidFill>
+                <a:latin typeface="Calibri"/>
+                <a:ea typeface="Calibri"/>
+                <a:cs typeface="Calibri"/>
+              </a:rPr>
+              <a:t>s</a:t>
             </a:r>
           </a:p>
         </p:txBody>
@@ -10002,7 +10178,29 @@
                 <a:ea typeface="Calibri"/>
                 <a:cs typeface="Calibri"/>
               </a:rPr>
-              <a:t>1. nₛ = 120 · 60/8 = 900 r/min.</a:t>
+              <a:t>1. n</a:t>
+            </a:r>
+            <a:r>
+              <a:rPr sz="2063" b="0" baseline="-25000">
+                <a:solidFill>
+                  <a:srgbClr val="111111"/>
+                </a:solidFill>
+                <a:latin typeface="Calibri"/>
+                <a:ea typeface="Calibri"/>
+                <a:cs typeface="Calibri"/>
+              </a:rPr>
+              <a:t>s</a:t>
+            </a:r>
+            <a:r>
+              <a:rPr sz="2063" b="0">
+                <a:solidFill>
+                  <a:srgbClr val="111111"/>
+                </a:solidFill>
+                <a:latin typeface="Calibri"/>
+                <a:ea typeface="Calibri"/>
+                <a:cs typeface="Calibri"/>
+              </a:rPr>
+              <a:t> = 120 · 60/8 = 900 r/min.</a:t>
             </a:r>
           </a:p>
           <a:p xmlns:a="http://schemas.openxmlformats.org/drawingml/2006/main">
@@ -10322,7 +10520,29 @@
                 <a:ea typeface="Calibri"/>
                 <a:cs typeface="Calibri"/>
               </a:rPr>
-              <a:t>nₛ = 120f/p</a:t>
+              <a:t>n</a:t>
+            </a:r>
+            <a:r>
+              <a:rPr sz="2400" b="1" baseline="-25000">
+                <a:solidFill>
+                  <a:srgbClr val="064F91"/>
+                </a:solidFill>
+                <a:latin typeface="Calibri"/>
+                <a:ea typeface="Calibri"/>
+                <a:cs typeface="Calibri"/>
+              </a:rPr>
+              <a:t>s</a:t>
+            </a:r>
+            <a:r>
+              <a:rPr sz="2400" b="1">
+                <a:solidFill>
+                  <a:srgbClr val="064F91"/>
+                </a:solidFill>
+                <a:latin typeface="Calibri"/>
+                <a:ea typeface="Calibri"/>
+                <a:cs typeface="Calibri"/>
+              </a:rPr>
+              <a:t> = 120f/p</a:t>
             </a:r>
           </a:p>
         </p:txBody>
@@ -15399,7 +15619,29 @@
                 <a:ea typeface="Calibri"/>
                 <a:cs typeface="Calibri"/>
               </a:rPr>
-              <a:t>Motorns n betyder varvtal i r/min. nₛ gäller magnetfältet.</a:t>
+              <a:t>Motorns n betyder varvtal i r/min. n</a:t>
+            </a:r>
+            <a:r>
+              <a:rPr sz="2250" b="0" baseline="-25000">
+                <a:solidFill>
+                  <a:srgbClr val="111111"/>
+                </a:solidFill>
+                <a:latin typeface="Calibri"/>
+                <a:ea typeface="Calibri"/>
+                <a:cs typeface="Calibri"/>
+              </a:rPr>
+              <a:t>s</a:t>
+            </a:r>
+            <a:r>
+              <a:rPr sz="2250" b="0">
+                <a:solidFill>
+                  <a:srgbClr val="111111"/>
+                </a:solidFill>
+                <a:latin typeface="Calibri"/>
+                <a:ea typeface="Calibri"/>
+                <a:cs typeface="Calibri"/>
+              </a:rPr>
+              <a:t> gäller magnetfältet.</a:t>
             </a:r>
           </a:p>
         </p:txBody>
@@ -15456,7 +15698,29 @@
                 <a:ea typeface="Calibri"/>
                 <a:cs typeface="Calibri"/>
               </a:rPr>
-              <a:t>p är antalet poler i formeln nₛ = 120f/p.</a:t>
+              <a:t>p är antalet poler i formeln n</a:t>
+            </a:r>
+            <a:r>
+              <a:rPr sz="2250" b="0" baseline="-25000">
+                <a:solidFill>
+                  <a:srgbClr val="111111"/>
+                </a:solidFill>
+                <a:latin typeface="Calibri"/>
+                <a:ea typeface="Calibri"/>
+                <a:cs typeface="Calibri"/>
+              </a:rPr>
+              <a:t>s</a:t>
+            </a:r>
+            <a:r>
+              <a:rPr sz="2250" b="0">
+                <a:solidFill>
+                  <a:srgbClr val="111111"/>
+                </a:solidFill>
+                <a:latin typeface="Calibri"/>
+                <a:ea typeface="Calibri"/>
+                <a:cs typeface="Calibri"/>
+              </a:rPr>
+              <a:t> = 120f/p.</a:t>
             </a:r>
           </a:p>
         </p:txBody>
@@ -16747,7 +17011,29 @@
                 <a:ea typeface="Calibri"/>
                 <a:cs typeface="Calibri"/>
               </a:rPr>
-              <a:t>nₛ = 120f/p</a:t>
+              <a:t>n</a:t>
+            </a:r>
+            <a:r>
+              <a:rPr sz="2925" b="1" baseline="-25000">
+                <a:solidFill>
+                  <a:srgbClr val="064F91"/>
+                </a:solidFill>
+                <a:latin typeface="Calibri"/>
+                <a:ea typeface="Calibri"/>
+                <a:cs typeface="Calibri"/>
+              </a:rPr>
+              <a:t>s</a:t>
+            </a:r>
+            <a:r>
+              <a:rPr sz="2925" b="1">
+                <a:solidFill>
+                  <a:srgbClr val="064F91"/>
+                </a:solidFill>
+                <a:latin typeface="Calibri"/>
+                <a:ea typeface="Calibri"/>
+                <a:cs typeface="Calibri"/>
+              </a:rPr>
+              <a:t> = 120f/p</a:t>
             </a:r>
           </a:p>
         </p:txBody>
@@ -16805,7 +17091,29 @@
                 <a:ea typeface="Calibri"/>
                 <a:cs typeface="Calibri"/>
               </a:rPr>
-              <a:t>Ombord: 60 Hz och fyra poler ger nₛ = 1 800 r/min.</a:t>
+              <a:t>Ombord: 60 Hz och fyra poler ger n</a:t>
+            </a:r>
+            <a:r>
+              <a:rPr sz="2250" b="0" baseline="-25000">
+                <a:solidFill>
+                  <a:srgbClr val="111111"/>
+                </a:solidFill>
+                <a:latin typeface="Calibri"/>
+                <a:ea typeface="Calibri"/>
+                <a:cs typeface="Calibri"/>
+              </a:rPr>
+              <a:t>s</a:t>
+            </a:r>
+            <a:r>
+              <a:rPr sz="2250" b="0">
+                <a:solidFill>
+                  <a:srgbClr val="111111"/>
+                </a:solidFill>
+                <a:latin typeface="Calibri"/>
+                <a:ea typeface="Calibri"/>
+                <a:cs typeface="Calibri"/>
+              </a:rPr>
+              <a:t> = 1 800 r/min.</a:t>
             </a:r>
           </a:p>
           <a:p xmlns:a="http://schemas.openxmlformats.org/drawingml/2006/main">
@@ -17131,7 +17439,40 @@
                 <a:ea typeface="Calibri"/>
                 <a:cs typeface="Calibri"/>
               </a:rPr>
-              <a:t>s = (nₛ − n)/nₛ</a:t>
+              <a:t>s = (n</a:t>
+            </a:r>
+            <a:r>
+              <a:rPr sz="2925" b="1" baseline="-25000">
+                <a:solidFill>
+                  <a:srgbClr val="064F91"/>
+                </a:solidFill>
+                <a:latin typeface="Calibri"/>
+                <a:ea typeface="Calibri"/>
+                <a:cs typeface="Calibri"/>
+              </a:rPr>
+              <a:t>s</a:t>
+            </a:r>
+            <a:r>
+              <a:rPr sz="2925" b="1">
+                <a:solidFill>
+                  <a:srgbClr val="064F91"/>
+                </a:solidFill>
+                <a:latin typeface="Calibri"/>
+                <a:ea typeface="Calibri"/>
+                <a:cs typeface="Calibri"/>
+              </a:rPr>
+              <a:t> − n)/n</a:t>
+            </a:r>
+            <a:r>
+              <a:rPr sz="2925" b="1" baseline="-25000">
+                <a:solidFill>
+                  <a:srgbClr val="064F91"/>
+                </a:solidFill>
+                <a:latin typeface="Calibri"/>
+                <a:ea typeface="Calibri"/>
+                <a:cs typeface="Calibri"/>
+              </a:rPr>
+              <a:t>s</a:t>
             </a:r>
           </a:p>
         </p:txBody>
@@ -17189,7 +17530,29 @@
                 <a:ea typeface="Calibri"/>
                 <a:cs typeface="Calibri"/>
               </a:rPr>
-              <a:t>nₛ = 1 800 och n = 1 746 r/min ger s = 0,03 = 3 %.</a:t>
+              <a:t>n</a:t>
+            </a:r>
+            <a:r>
+              <a:rPr sz="2100" b="0" baseline="-25000">
+                <a:solidFill>
+                  <a:srgbClr val="111111"/>
+                </a:solidFill>
+                <a:latin typeface="Calibri"/>
+                <a:ea typeface="Calibri"/>
+                <a:cs typeface="Calibri"/>
+              </a:rPr>
+              <a:t>s</a:t>
+            </a:r>
+            <a:r>
+              <a:rPr sz="2100" b="0">
+                <a:solidFill>
+                  <a:srgbClr val="111111"/>
+                </a:solidFill>
+                <a:latin typeface="Calibri"/>
+                <a:ea typeface="Calibri"/>
+                <a:cs typeface="Calibri"/>
+              </a:rPr>
+              <a:t> = 1 800 och n = 1 746 r/min ger s = 0,03 = 3 %.</a:t>
             </a:r>
           </a:p>
           <a:p xmlns:a="http://schemas.openxmlformats.org/drawingml/2006/main">

--- a/sjoskolan/vecka-43/aktuell/v43_02_Transformatorer_och_motorer_elev.pptx
+++ b/sjoskolan/vecka-43/aktuell/v43_02_Transformatorer_och_motorer_elev.pptx
@@ -5819,7 +5819,7 @@
                 <a:ea typeface="Calibri"/>
                 <a:cs typeface="Calibri"/>
               </a:rPr>
-              <a:t>Förutsättningar: Fyrpolig motor: p = 4. Frekvensen f = 50 Hz. I den här formeln är p antalet poler, inte polpar.</a:t>
+              <a:t>Förutsättningar: Landnät (till sjöss oftast 60 Hz). Fyrpolig motor: p = 4. Frekvensen f = 50 Hz. I den här formeln är p antalet poler, inte polpar.</a:t>
             </a:r>
           </a:p>
         </p:txBody>
@@ -6587,7 +6587,7 @@
                 <a:ea typeface="Calibri"/>
                 <a:cs typeface="Calibri"/>
               </a:rPr>
-              <a:t>Förutsättningar: p = 6 poler och f = 50 Hz.</a:t>
+              <a:t>Förutsättningar: Landnät. p = 6 poler och f = 50 Hz.</a:t>
             </a:r>
           </a:p>
         </p:txBody>
@@ -7389,7 +7389,7 @@
                 <a:ea typeface="Calibri"/>
                 <a:cs typeface="Calibri"/>
               </a:rPr>
-              <a:t>Förutsättningar: f = 50 Hz, p = 4 och n = 1 440 r/min. Motorn går som motor, alltså inte som generator.</a:t>
+              <a:t>Förutsättningar: Landnät. f = 50 Hz, p = 4 och n = 1 440 r/min. Motorn går som motor, alltså inte som generator.</a:t>
             </a:r>
           </a:p>
         </p:txBody>
@@ -11424,7 +11424,7 @@
                 <a:ea typeface="Calibri"/>
                 <a:cs typeface="Calibri"/>
               </a:rPr>
-              <a:t>Förutsättningar: Nät 400 V. Motor A: Δ/Y 230/400 V. Motor B: Δ/Y 400/690 V.</a:t>
+              <a:t>Förutsättningar: Landström vid kaj, 50 Hz. Nät 400 V. Motor A: Δ/Y 230/400 V. Motor B: Δ/Y 400/690 V.</a:t>
             </a:r>
           </a:p>
         </p:txBody>

--- a/sjoskolan/vecka-43/aktuell/v43_02_Transformatorer_och_motorer_elev.pptx
+++ b/sjoskolan/vecka-43/aktuell/v43_02_Transformatorer_och_motorer_elev.pptx
@@ -5819,7 +5819,7 @@
                 <a:ea typeface="Calibri"/>
                 <a:cs typeface="Calibri"/>
               </a:rPr>
-              <a:t>Förutsättningar: Landnät (till sjöss oftast 60 Hz). Fyrpolig motor: p = 4. Frekvensen f = 50 Hz. I den här formeln är p antalet poler, inte polpar.</a:t>
+              <a:t>Förutsättningar: Landnät (till sjöss oftast 60 Hz). Tvåpolig motor: p = 2. Frekvensen f = 50 Hz. I den här formeln är p antalet poler, inte polpar.</a:t>
             </a:r>
           </a:p>
         </p:txBody>
@@ -6175,7 +6175,7 @@
                 <a:ea typeface="Calibri"/>
                 <a:cs typeface="Calibri"/>
               </a:rPr>
-              <a:t> för en fyrpolig motor vid 50 Hz.</a:t>
+              <a:t> för en tvåpolig motor vid 50 Hz.</a:t>
             </a:r>
           </a:p>
         </p:txBody>
@@ -7389,7 +7389,7 @@
                 <a:ea typeface="Calibri"/>
                 <a:cs typeface="Calibri"/>
               </a:rPr>
-              <a:t>Förutsättningar: Landnät. f = 50 Hz, p = 4 och n = 1 440 r/min. Motorn går som motor, alltså inte som generator.</a:t>
+              <a:t>Förutsättningar: Landnät. f = 50 Hz, p = 4 och n = 1 430 r/min. Motorn går som motor, alltså inte som generator.</a:t>
             </a:r>
           </a:p>
         </p:txBody>
@@ -7789,7 +7789,7 @@
                 <a:ea typeface="Calibri"/>
                 <a:cs typeface="Calibri"/>
               </a:rPr>
-              <a:t>En fyrpolig 50 Hz-motor går med 1 440 r/min. Beräkna eftersläpningen i procent.</a:t>
+              <a:t>En fyrpolig 50 Hz-motor går med 1 430 r/min. Beräkna eftersläpningen i procent.</a:t>
             </a:r>
           </a:p>
         </p:txBody>
@@ -8951,7 +8951,7 @@
                 <a:ea typeface="Calibri"/>
                 <a:cs typeface="Calibri"/>
               </a:rPr>
-              <a:t>Ombord: en 440/760 V Δ/Y-motor kan vara kandidat vid 440 V.</a:t>
+              <a:t>Ombord: en 690/1 200 V Δ/Y-motor kan vara kandidat vid 690 V.</a:t>
             </a:r>
           </a:p>
           <a:p xmlns:a="http://schemas.openxmlformats.org/drawingml/2006/main">
@@ -11424,7 +11424,7 @@
                 <a:ea typeface="Calibri"/>
                 <a:cs typeface="Calibri"/>
               </a:rPr>
-              <a:t>Förutsättningar: Landström vid kaj, 50 Hz. Nät 400 V. Motor A: Δ/Y 230/400 V. Motor B: Δ/Y 400/690 V.</a:t>
+              <a:t>Förutsättningar: Fartygets nät, 60 Hz. Nät 440 V. Motor A: Δ/Y 254/440 V. Motor B: Δ/Y 440/760 V.</a:t>
             </a:r>
           </a:p>
         </p:txBody>
@@ -11481,7 +11481,7 @@
                 <a:ea typeface="Calibri"/>
                 <a:cs typeface="Calibri"/>
               </a:rPr>
-              <a:t>Arbetsgång: Jämför 400 V med motorernas Δ-spänning. Frågan gäller normal drift, inte hur motorn ska startas.</a:t>
+              <a:t>Arbetsgång: Jämför 440 V med motorernas Δ-spänning. Frågan gäller normal drift, inte hur motorn ska startas.</a:t>
             </a:r>
           </a:p>
         </p:txBody>
@@ -11758,7 +11758,7 @@
                 <a:ea typeface="Calibri"/>
                 <a:cs typeface="Calibri"/>
               </a:rPr>
-              <a:t>Nätet är 400 V. Motor A är Δ/Y 230/400 V, motor B Δ/Y 400/690 V. Vilken av motorerna ska kopplas i Δ på det här nätet?</a:t>
+              <a:t>Nätet är 440 V. Motor A är Δ/Y 254/440 V, motor B Δ/Y 440/760 V. Vilken av motorerna ska kopplas i Δ på det här nätet?</a:t>
             </a:r>
           </a:p>
         </p:txBody>
@@ -14587,7 +14587,7 @@
                 <a:ea typeface="Calibri"/>
                 <a:cs typeface="Calibri"/>
               </a:rPr>
-              <a:t>Överlastskyddet för en motor löser ut gång på gång. Föreslå två olika möjliga orsaker och vilken information som kan skilja dem åt.</a:t>
+              <a:t>Motorns överlastskydd löser ut gång på gång. a) Ge två möjliga orsaker. b) Vad kan du mäta för att se vilken orsak det är?</a:t>
             </a:r>
           </a:p>
         </p:txBody>

--- a/sjoskolan/vecka-43/aktuell/v43_02_Transformatorer_och_motorer_elev.pptx
+++ b/sjoskolan/vecka-43/aktuell/v43_02_Transformatorer_och_motorer_elev.pptx
@@ -8120,7 +8120,7 @@
                 </a:solidFill>
                 <a:latin typeface="Calibri"/>
               </a:rPr>
-              <a:t>1. Läs del 2: teorin och de två exemplen.</a:t>
+              <a:t>1. Läs del 2: teorin och de två exemplen. Tryck på ”Jag har läst del 2” längst ned på sidan.</a:t>
             </a:r>
           </a:p>
           <a:p>
@@ -8158,7 +8158,7 @@
                 </a:solidFill>
                 <a:latin typeface="Calibri"/>
               </a:rPr>
-              <a:t>3. Läs del 3, Elscheman och dokumentation, på egen hand.</a:t>
+              <a:t>3. Läs del 3, Elscheman och dokumentation, på egen hand. Tryck på ”Jag har läst del 3” längst ned på sidan.</a:t>
             </a:r>
           </a:p>
           <a:p>

--- a/sjoskolan/vecka-43/aktuell/v43_02_Transformatorer_och_motorer_elev.pptx
+++ b/sjoskolan/vecka-43/aktuell/v43_02_Transformatorer_och_motorer_elev.pptx
@@ -6924,7 +6924,7 @@
                 </a:solidFill>
                 <a:latin typeface="Calibri"/>
               </a:rPr>
-              <a:t>Förbered en funktionsbeskrivning av motorstartaren. Skilj elektrisk inmatning, skyddsfunktion och mekanisk last.</a:t>
+              <a:t>Uppgiften Motorns märkskylt i inlämningen bygger på del 2. Inlämningen senast fredag 23 oktober.</a:t>
             </a:r>
           </a:p>
         </p:txBody>
@@ -8120,7 +8120,7 @@
                 </a:solidFill>
                 <a:latin typeface="Calibri"/>
               </a:rPr>
-              <a:t>1. Läs del 2: teorin och de två exemplen. Tryck på ”Jag har läst del 2” längst ned på sidan.</a:t>
+              <a:t>1. Läs del 2 och tryck på ”Jag har läst del 2” längst ned på sidan.</a:t>
             </a:r>
           </a:p>
           <a:p>
@@ -8158,7 +8158,7 @@
                 </a:solidFill>
                 <a:latin typeface="Calibri"/>
               </a:rPr>
-              <a:t>3. Läs del 3, Elscheman och dokumentation, på egen hand. Tryck på ”Jag har läst del 3” längst ned på sidan.</a:t>
+              <a:t>3. Gör uppgift 1 i inlämningen, motorns märkskylt.</a:t>
             </a:r>
           </a:p>
           <a:p>
@@ -8177,7 +8177,7 @@
                 </a:solidFill>
                 <a:latin typeface="Calibri"/>
               </a:rPr>
-              <a:t>4. Gör övning 3.1–3.5 i del 3.</a:t>
+              <a:t>4. Läs del 3 på egen hand och tryck på ”Jag har läst del 3” längst ned på sidan.</a:t>
             </a:r>
           </a:p>
           <a:p>
@@ -8196,7 +8196,7 @@
                 </a:solidFill>
                 <a:latin typeface="Calibri"/>
               </a:rPr>
-              <a:t>5. Hållkretslabbet: gör de 8 räkna-först-uppgifterna.</a:t>
+              <a:t>5. Gör övning 3.1–3.5 i del 3.</a:t>
             </a:r>
           </a:p>
           <a:p>
@@ -8215,7 +8215,26 @@
                 </a:solidFill>
                 <a:latin typeface="Calibri"/>
               </a:rPr>
-              <a:t>6. Fredag 09.00: frågor om del 3 och del 4, Systematisk felsökning.</a:t>
+              <a:t>6. Hållkretslabbet: gör de 8 räkna-först-uppgifterna.</a:t>
+            </a:r>
+          </a:p>
+          <a:p>
+            <a:pPr algn="l">
+              <a:lnSpc>
+                <a:spcPct val="108000"/>
+              </a:lnSpc>
+              <a:spcAft>
+                <a:spcPts val="1400"/>
+              </a:spcAft>
+            </a:pPr>
+            <a:r>
+              <a:rPr sz="2000" b="0" i="0">
+                <a:solidFill>
+                  <a:srgbClr val="111111"/>
+                </a:solidFill>
+                <a:latin typeface="Calibri"/>
+              </a:rPr>
+              <a:t>7. Fredag 09.00: frågor om del 3 och del 4, Systematisk felsökning.</a:t>
             </a:r>
           </a:p>
           <a:p>
@@ -8234,7 +8253,7 @@
                 </a:solidFill>
                 <a:latin typeface="Calibri"/>
               </a:rPr>
-              <a:t>Inlämningen och felsökningsrapporten senast fredag 23 oktober. Allt finns på veckosidan.</a:t>
+              <a:t>Inlämningen, uppgift 1–4, senast fredag 23 oktober. Allt finns på veckosidan.</a:t>
             </a:r>
           </a:p>
         </p:txBody>
@@ -9219,7 +9238,7 @@
         <p:spPr>
           <a:xfrm>
             <a:off x="640080" y="1417320"/>
-            <a:ext cx="1005840" cy="499491"/>
+            <a:ext cx="1005840" cy="437896"/>
           </a:xfrm>
           <a:prstGeom prst="rect">
             <a:avLst/>
@@ -9261,7 +9280,7 @@
         <p:spPr>
           <a:xfrm>
             <a:off x="1783080" y="1417320"/>
-            <a:ext cx="6720840" cy="499491"/>
+            <a:ext cx="6720840" cy="437896"/>
           </a:xfrm>
           <a:prstGeom prst="rect">
             <a:avLst/>
@@ -9302,8 +9321,8 @@
         </p:nvSpPr>
         <p:spPr>
           <a:xfrm>
-            <a:off x="640080" y="1971675"/>
-            <a:ext cx="1005840" cy="499491"/>
+            <a:off x="640080" y="1910080"/>
+            <a:ext cx="1005840" cy="437896"/>
           </a:xfrm>
           <a:prstGeom prst="rect">
             <a:avLst/>
@@ -9344,8 +9363,8 @@
         </p:nvSpPr>
         <p:spPr>
           <a:xfrm>
-            <a:off x="1783080" y="1971675"/>
-            <a:ext cx="6720840" cy="499491"/>
+            <a:off x="1783080" y="1910080"/>
+            <a:ext cx="6720840" cy="437896"/>
           </a:xfrm>
           <a:prstGeom prst="rect">
             <a:avLst/>
@@ -9373,7 +9392,7 @@
                 </a:solidFill>
                 <a:latin typeface="Calibri"/>
               </a:rPr>
-              <a:t>Pass 1: Transformatorn och motorns varvtal (avsnitt 1–4) och två exempel</a:t>
+              <a:t>Pass 1: Transformatorn och det roterande fältet (avsnitt 1–3) och ett exempel</a:t>
             </a:r>
           </a:p>
         </p:txBody>
@@ -9386,8 +9405,8 @@
         </p:nvSpPr>
         <p:spPr>
           <a:xfrm>
-            <a:off x="640080" y="2526030"/>
-            <a:ext cx="1005840" cy="499491"/>
+            <a:off x="640080" y="2402840"/>
+            <a:ext cx="1005840" cy="437896"/>
           </a:xfrm>
           <a:prstGeom prst="rect">
             <a:avLst/>
@@ -9415,7 +9434,7 @@
                 </a:solidFill>
                 <a:latin typeface="Calibri"/>
               </a:rPr>
-              <a:t>15.25</a:t>
+              <a:t>15.20</a:t>
             </a:r>
           </a:p>
         </p:txBody>
@@ -9428,8 +9447,8 @@
         </p:nvSpPr>
         <p:spPr>
           <a:xfrm>
-            <a:off x="1783080" y="2526030"/>
-            <a:ext cx="6720840" cy="499491"/>
+            <a:off x="1783080" y="2402840"/>
+            <a:ext cx="6720840" cy="437896"/>
           </a:xfrm>
           <a:prstGeom prst="rect">
             <a:avLst/>
@@ -9470,8 +9489,8 @@
         </p:nvSpPr>
         <p:spPr>
           <a:xfrm>
-            <a:off x="640080" y="3080385"/>
-            <a:ext cx="1005840" cy="499491"/>
+            <a:off x="640080" y="2895600"/>
+            <a:ext cx="1005840" cy="437896"/>
           </a:xfrm>
           <a:prstGeom prst="rect">
             <a:avLst/>
@@ -9499,7 +9518,7 @@
                 </a:solidFill>
                 <a:latin typeface="Calibri"/>
               </a:rPr>
-              <a:t>15.50</a:t>
+              <a:t>15.40</a:t>
             </a:r>
           </a:p>
         </p:txBody>
@@ -9512,8 +9531,8 @@
         </p:nvSpPr>
         <p:spPr>
           <a:xfrm>
-            <a:off x="1783080" y="3080385"/>
-            <a:ext cx="6720840" cy="499491"/>
+            <a:off x="1783080" y="2895600"/>
+            <a:ext cx="6720840" cy="437896"/>
           </a:xfrm>
           <a:prstGeom prst="rect">
             <a:avLst/>
@@ -9541,6 +9560,90 @@
                 </a:solidFill>
                 <a:latin typeface="Calibri"/>
               </a:rPr>
+              <a:t>Eftersläpning (avsnitt 4) och ett exempel</a:t>
+            </a:r>
+          </a:p>
+        </p:txBody>
+      </p:sp>
+      <p:sp>
+        <p:nvSpPr>
+          <p:cNvPr id="12" name="TextBox 11"/>
+          <p:cNvSpPr txBox="1"/>
+          <p:nvPr/>
+        </p:nvSpPr>
+        <p:spPr>
+          <a:xfrm>
+            <a:off x="640080" y="3388360"/>
+            <a:ext cx="1005840" cy="437896"/>
+          </a:xfrm>
+          <a:prstGeom prst="rect">
+            <a:avLst/>
+          </a:prstGeom>
+          <a:noFill/>
+        </p:spPr>
+        <p:txBody>
+          <a:bodyPr wrap="square" anchor="ctr" lIns="27432" rIns="27432" tIns="18288" bIns="18288">
+            <a:spAutoFit/>
+          </a:bodyPr>
+          <a:lstStyle/>
+          <a:p>
+            <a:pPr algn="l">
+              <a:lnSpc>
+                <a:spcPct val="108000"/>
+              </a:lnSpc>
+              <a:spcAft>
+                <a:spcPts val="0"/>
+              </a:spcAft>
+            </a:pPr>
+            <a:r>
+              <a:rPr sz="1800" b="1" i="0">
+                <a:solidFill>
+                  <a:srgbClr val="064F91"/>
+                </a:solidFill>
+                <a:latin typeface="Calibri"/>
+              </a:rPr>
+              <a:t>15.50</a:t>
+            </a:r>
+          </a:p>
+        </p:txBody>
+      </p:sp>
+      <p:sp>
+        <p:nvSpPr>
+          <p:cNvPr id="13" name="TextBox 12"/>
+          <p:cNvSpPr txBox="1"/>
+          <p:nvPr/>
+        </p:nvSpPr>
+        <p:spPr>
+          <a:xfrm>
+            <a:off x="1783080" y="3388360"/>
+            <a:ext cx="6720840" cy="437896"/>
+          </a:xfrm>
+          <a:prstGeom prst="rect">
+            <a:avLst/>
+          </a:prstGeom>
+          <a:noFill/>
+        </p:spPr>
+        <p:txBody>
+          <a:bodyPr wrap="square" anchor="ctr" lIns="27432" rIns="27432" tIns="18288" bIns="18288">
+            <a:spAutoFit/>
+          </a:bodyPr>
+          <a:lstStyle/>
+          <a:p>
+            <a:pPr algn="l">
+              <a:lnSpc>
+                <a:spcPct val="108000"/>
+              </a:lnSpc>
+              <a:spcAft>
+                <a:spcPts val="0"/>
+              </a:spcAft>
+            </a:pPr>
+            <a:r>
+              <a:rPr sz="1800" b="0" i="0">
+                <a:solidFill>
+                  <a:srgbClr val="111111"/>
+                </a:solidFill>
+                <a:latin typeface="Calibri"/>
+              </a:rPr>
               <a:t>Övning 2.5 tillsammans</a:t>
             </a:r>
           </a:p>
@@ -9548,14 +9651,14 @@
       </p:sp>
       <p:sp>
         <p:nvSpPr>
-          <p:cNvPr id="12" name="Rectangle 11"/>
+          <p:cNvPr id="14" name="Rectangle 13"/>
           <p:cNvSpPr/>
           <p:nvPr/>
         </p:nvSpPr>
         <p:spPr>
           <a:xfrm>
-            <a:off x="548640" y="3634740"/>
-            <a:ext cx="8046720" cy="499491"/>
+            <a:off x="548640" y="3881120"/>
+            <a:ext cx="8046720" cy="437896"/>
           </a:xfrm>
           <a:prstGeom prst="rect">
             <a:avLst/>
@@ -9590,14 +9693,14 @@
       </p:sp>
       <p:sp>
         <p:nvSpPr>
-          <p:cNvPr id="13" name="TextBox 12"/>
+          <p:cNvPr id="15" name="TextBox 14"/>
           <p:cNvSpPr txBox="1"/>
           <p:nvPr/>
         </p:nvSpPr>
         <p:spPr>
           <a:xfrm>
-            <a:off x="640080" y="3634740"/>
-            <a:ext cx="1005840" cy="499491"/>
+            <a:off x="640080" y="3881120"/>
+            <a:ext cx="1005840" cy="437896"/>
           </a:xfrm>
           <a:prstGeom prst="rect">
             <a:avLst/>
@@ -9632,14 +9735,14 @@
       </p:sp>
       <p:sp>
         <p:nvSpPr>
-          <p:cNvPr id="14" name="TextBox 13"/>
+          <p:cNvPr id="16" name="TextBox 15"/>
           <p:cNvSpPr txBox="1"/>
           <p:nvPr/>
         </p:nvSpPr>
         <p:spPr>
           <a:xfrm>
-            <a:off x="1783080" y="3634740"/>
-            <a:ext cx="6720840" cy="499491"/>
+            <a:off x="1783080" y="3881120"/>
+            <a:ext cx="6720840" cy="437896"/>
           </a:xfrm>
           <a:prstGeom prst="rect">
             <a:avLst/>
@@ -9674,14 +9777,14 @@
       </p:sp>
       <p:sp>
         <p:nvSpPr>
-          <p:cNvPr id="15" name="TextBox 14"/>
+          <p:cNvPr id="17" name="TextBox 16"/>
           <p:cNvSpPr txBox="1"/>
           <p:nvPr/>
         </p:nvSpPr>
         <p:spPr>
           <a:xfrm>
-            <a:off x="640080" y="4189095"/>
-            <a:ext cx="1005840" cy="499491"/>
+            <a:off x="640080" y="4373880"/>
+            <a:ext cx="1005840" cy="437896"/>
           </a:xfrm>
           <a:prstGeom prst="rect">
             <a:avLst/>
@@ -9716,14 +9819,14 @@
       </p:sp>
       <p:sp>
         <p:nvSpPr>
-          <p:cNvPr id="16" name="TextBox 15"/>
+          <p:cNvPr id="18" name="TextBox 17"/>
           <p:cNvSpPr txBox="1"/>
           <p:nvPr/>
         </p:nvSpPr>
         <p:spPr>
           <a:xfrm>
-            <a:off x="1783080" y="4189095"/>
-            <a:ext cx="6720840" cy="499491"/>
+            <a:off x="1783080" y="4373880"/>
+            <a:ext cx="6720840" cy="437896"/>
           </a:xfrm>
           <a:prstGeom prst="rect">
             <a:avLst/>
@@ -9758,14 +9861,14 @@
       </p:sp>
       <p:sp>
         <p:nvSpPr>
-          <p:cNvPr id="17" name="TextBox 16"/>
+          <p:cNvPr id="19" name="TextBox 18"/>
           <p:cNvSpPr txBox="1"/>
           <p:nvPr/>
         </p:nvSpPr>
         <p:spPr>
           <a:xfrm>
-            <a:off x="640080" y="4743450"/>
-            <a:ext cx="1005840" cy="499491"/>
+            <a:off x="640080" y="4866640"/>
+            <a:ext cx="1005840" cy="437896"/>
           </a:xfrm>
           <a:prstGeom prst="rect">
             <a:avLst/>
@@ -9800,14 +9903,14 @@
       </p:sp>
       <p:sp>
         <p:nvSpPr>
-          <p:cNvPr id="18" name="TextBox 17"/>
+          <p:cNvPr id="20" name="TextBox 19"/>
           <p:cNvSpPr txBox="1"/>
           <p:nvPr/>
         </p:nvSpPr>
         <p:spPr>
           <a:xfrm>
-            <a:off x="1783080" y="4743450"/>
-            <a:ext cx="6720840" cy="499491"/>
+            <a:off x="1783080" y="4866640"/>
+            <a:ext cx="6720840" cy="437896"/>
           </a:xfrm>
           <a:prstGeom prst="rect">
             <a:avLst/>
@@ -9842,14 +9945,14 @@
       </p:sp>
       <p:sp>
         <p:nvSpPr>
-          <p:cNvPr id="19" name="TextBox 18"/>
+          <p:cNvPr id="21" name="TextBox 20"/>
           <p:cNvSpPr txBox="1"/>
           <p:nvPr/>
         </p:nvSpPr>
         <p:spPr>
           <a:xfrm>
-            <a:off x="640080" y="5297805"/>
-            <a:ext cx="1005840" cy="499491"/>
+            <a:off x="640080" y="5359400"/>
+            <a:ext cx="1005840" cy="437896"/>
           </a:xfrm>
           <a:prstGeom prst="rect">
             <a:avLst/>
@@ -9884,14 +9987,14 @@
       </p:sp>
       <p:sp>
         <p:nvSpPr>
-          <p:cNvPr id="20" name="TextBox 19"/>
+          <p:cNvPr id="22" name="TextBox 21"/>
           <p:cNvSpPr txBox="1"/>
           <p:nvPr/>
         </p:nvSpPr>
         <p:spPr>
           <a:xfrm>
-            <a:off x="1783080" y="5297805"/>
-            <a:ext cx="6720840" cy="499491"/>
+            <a:off x="1783080" y="5359400"/>
+            <a:ext cx="6720840" cy="437896"/>
           </a:xfrm>
           <a:prstGeom prst="rect">
             <a:avLst/>
@@ -9926,7 +10029,7 @@
       </p:sp>
       <p:pic>
         <p:nvPicPr>
-          <p:cNvPr id="21" name="Picture 20" descr="sidfot.jpg"/>
+          <p:cNvPr id="23" name="Picture 22" descr="sidfot.jpg"/>
           <p:cNvPicPr>
             <a:picLocks noChangeAspect="1"/>
           </p:cNvPicPr>
@@ -9950,7 +10053,7 @@
       </p:pic>
       <p:sp>
         <p:nvSpPr>
-          <p:cNvPr id="22" name="TextBox 21"/>
+          <p:cNvPr id="24" name="TextBox 23"/>
           <p:cNvSpPr txBox="1"/>
           <p:nvPr/>
         </p:nvSpPr>
@@ -9992,7 +10095,7 @@
       </p:sp>
       <p:sp>
         <p:nvSpPr>
-          <p:cNvPr id="23" name="TextBox 22"/>
+          <p:cNvPr id="25" name="TextBox 24"/>
           <p:cNvSpPr txBox="1"/>
           <p:nvPr/>
         </p:nvSpPr>

--- a/sjoskolan/vecka-43/aktuell/v43_02_Transformatorer_och_motorer_elev.pptx
+++ b/sjoskolan/vecka-43/aktuell/v43_02_Transformatorer_och_motorer_elev.pptx
@@ -4888,7 +4888,7 @@
                 </a:solidFill>
                 <a:latin typeface="Calibri"/>
               </a:rPr>
-              <a:t>Eftersläpning</a:t>
+              <a:t>Varvtal och eftersläpning</a:t>
             </a:r>
           </a:p>
         </p:txBody>
@@ -4930,7 +4930,7 @@
                 </a:solidFill>
                 <a:latin typeface="Calibri"/>
               </a:rPr>
-              <a:t>Fem minuter. Skriv ditt svar i chatten. Övning 2.6–2.10 gör du själv efter lektionen.</a:t>
+              <a:t>Fem minuter. Skriv synkront varvtal i r/min och eftersläpning i procent i chatten. Övning 2.6–2.10 gör du själv efter lektionen.</a:t>
             </a:r>
           </a:p>
           <a:p>
